--- a/HW/Проект.pptx
+++ b/HW/Проект.pptx
@@ -3,21 +3,23 @@
 <p:presentation xmlns:a="http://schemas.openxmlformats.org/drawingml/2006/main" xmlns:p="http://schemas.openxmlformats.org/presentationml/2006/main" xmlns:r="http://schemas.openxmlformats.org/officeDocument/2006/relationships" xmlns:p14="http://schemas.microsoft.com/office/powerpoint/2010/main" xmlns:p15="http://schemas.microsoft.com/office/powerpoint/2012/main" xmlns:mc="http://schemas.openxmlformats.org/markup-compatibility/2006">
   <p:sldMasterIdLst>
     <p:sldMasterId id="2147483648" r:id="rId2"/>
+    <p:sldMasterId id="2147483651" r:id="rId3"/>
   </p:sldMasterIdLst>
   <p:notesMasterIdLst>
-    <p:notesMasterId r:id="rId3"/>
+    <p:notesMasterId r:id="rId4"/>
   </p:notesMasterIdLst>
   <p:sldIdLst>
-    <p:sldId id="256" r:id="rId4"/>
-    <p:sldId id="257" r:id="rId5"/>
-    <p:sldId id="258" r:id="rId6"/>
-    <p:sldId id="259" r:id="rId7"/>
-    <p:sldId id="260" r:id="rId8"/>
-    <p:sldId id="261" r:id="rId9"/>
-    <p:sldId id="262" r:id="rId10"/>
-    <p:sldId id="263" r:id="rId11"/>
-    <p:sldId id="264" r:id="rId12"/>
-    <p:sldId id="265" r:id="rId13"/>
+    <p:sldId id="256" r:id="rId5"/>
+    <p:sldId id="257" r:id="rId6"/>
+    <p:sldId id="258" r:id="rId7"/>
+    <p:sldId id="259" r:id="rId8"/>
+    <p:sldId id="260" r:id="rId9"/>
+    <p:sldId id="261" r:id="rId10"/>
+    <p:sldId id="262" r:id="rId11"/>
+    <p:sldId id="263" r:id="rId12"/>
+    <p:sldId id="264" r:id="rId13"/>
+    <p:sldId id="265" r:id="rId14"/>
+    <p:sldId id="266" r:id="rId15"/>
   </p:sldIdLst>
   <p:sldSz cx="12192000" cy="6858000"/>
   <p:notesSz cx="7559675" cy="10691813"/>
@@ -373,7 +375,7 @@
             <a:pPr indent="0" algn="r">
               <a:buNone/>
             </a:pPr>
-            <a:fld id="{1ADD6C89-646F-4A25-B95F-3AC68BB6DF34}" type="slidenum">
+            <a:fld id="{1DD12F00-3AF8-4C45-BCEF-2A89DD3D4120}" type="slidenum">
               <a:rPr lang="en-US" sz="1400" b="0" u="none" strike="noStrike">
                 <a:solidFill>
                   <a:srgbClr val="000000"/>
@@ -420,7 +422,7 @@
       </p:grpSpPr>
       <p:sp>
         <p:nvSpPr>
-          <p:cNvPr id="109" name="PlaceHolder 1"/>
+          <p:cNvPr id="113" name="PlaceHolder 1"/>
           <p:cNvSpPr>
             <a:spLocks noGrp="1"/>
           </p:cNvSpPr>
@@ -475,7 +477,7 @@
                 <a:tab pos="0" algn="l"/>
               </a:tabLst>
             </a:pPr>
-            <a:fld id="{82B66109-5EFB-412C-8C19-C2E300C8A985}" type="slidenum">
+            <a:fld id="{DB3B1888-F37F-4EC9-B5E2-41FF30DD8218}" type="slidenum">
               <a:rPr lang="en-US" sz="1400" b="0" u="none" strike="noStrike">
                 <a:solidFill>
                   <a:srgbClr val="000000"/>
@@ -500,7 +502,7 @@
       </p:sp>
       <p:sp>
         <p:nvSpPr>
-          <p:cNvPr id="110" name="PlaceHolder 2"/>
+          <p:cNvPr id="114" name="PlaceHolder 2"/>
           <p:cNvSpPr>
             <a:spLocks noGrp="1"/>
           </p:cNvSpPr>
@@ -523,7 +525,7 @@
       </p:sp>
       <p:sp>
         <p:nvSpPr>
-          <p:cNvPr id="111" name="PlaceHolder 3"/>
+          <p:cNvPr id="115" name="PlaceHolder 3"/>
           <p:cNvSpPr>
             <a:spLocks noGrp="1"/>
           </p:cNvSpPr>
@@ -568,7 +570,7 @@
 </p:notes>
 </file>
 
-<file path=ppt/notesSlides/notesSlide10.xml><?xml version="1.0" encoding="utf-8"?>
+<file path=ppt/notesSlides/notesSlide11.xml><?xml version="1.0" encoding="utf-8"?>
 <p:notes xmlns:a="http://schemas.openxmlformats.org/drawingml/2006/main" xmlns:p="http://schemas.openxmlformats.org/presentationml/2006/main" xmlns:r="http://schemas.openxmlformats.org/officeDocument/2006/relationships" xmlns:p14="http://schemas.microsoft.com/office/powerpoint/2010/main" xmlns:p15="http://schemas.microsoft.com/office/powerpoint/2012/main" xmlns:mc="http://schemas.openxmlformats.org/markup-compatibility/2006">
   <p:cSld>
     <p:spTree>
@@ -587,7 +589,7 @@
       </p:grpSpPr>
       <p:sp>
         <p:nvSpPr>
-          <p:cNvPr id="115" name="PlaceHolder 1"/>
+          <p:cNvPr id="119" name="PlaceHolder 1"/>
           <p:cNvSpPr>
             <a:spLocks noGrp="1"/>
           </p:cNvSpPr>
@@ -642,7 +644,7 @@
                 <a:tab pos="0" algn="l"/>
               </a:tabLst>
             </a:pPr>
-            <a:fld id="{2A20C1F4-B422-4CF3-B357-AE171143F893}" type="slidenum">
+            <a:fld id="{04A8B047-4B96-4FF6-9A84-11F230644E26}" type="slidenum">
               <a:rPr lang="en-US" sz="1400" b="0" u="none" strike="noStrike">
                 <a:solidFill>
                   <a:srgbClr val="000000"/>
@@ -667,7 +669,7 @@
       </p:sp>
       <p:sp>
         <p:nvSpPr>
-          <p:cNvPr id="116" name="PlaceHolder 2"/>
+          <p:cNvPr id="120" name="PlaceHolder 2"/>
           <p:cNvSpPr>
             <a:spLocks noGrp="1"/>
           </p:cNvSpPr>
@@ -690,7 +692,7 @@
       </p:sp>
       <p:sp>
         <p:nvSpPr>
-          <p:cNvPr id="117" name="PlaceHolder 3"/>
+          <p:cNvPr id="121" name="PlaceHolder 3"/>
           <p:cNvSpPr>
             <a:spLocks noGrp="1"/>
           </p:cNvSpPr>
@@ -754,7 +756,7 @@
       </p:grpSpPr>
       <p:sp>
         <p:nvSpPr>
-          <p:cNvPr id="112" name="PlaceHolder 1"/>
+          <p:cNvPr id="116" name="PlaceHolder 1"/>
           <p:cNvSpPr>
             <a:spLocks noGrp="1"/>
           </p:cNvSpPr>
@@ -809,7 +811,7 @@
                 <a:tab pos="0" algn="l"/>
               </a:tabLst>
             </a:pPr>
-            <a:fld id="{73F84AB8-691C-4793-91AA-899ADE4DACF0}" type="slidenum">
+            <a:fld id="{7C8CC7FC-9EC4-4138-885D-D3C122E41297}" type="slidenum">
               <a:rPr lang="en-US" sz="1400" b="1" u="none" strike="noStrike">
                 <a:solidFill>
                   <a:srgbClr val="000000"/>
@@ -834,7 +836,7 @@
       </p:sp>
       <p:sp>
         <p:nvSpPr>
-          <p:cNvPr id="113" name="PlaceHolder 2"/>
+          <p:cNvPr id="117" name="PlaceHolder 2"/>
           <p:cNvSpPr>
             <a:spLocks noGrp="1"/>
           </p:cNvSpPr>
@@ -857,7 +859,7 @@
       </p:sp>
       <p:sp>
         <p:nvSpPr>
-          <p:cNvPr id="114" name="PlaceHolder 3"/>
+          <p:cNvPr id="118" name="PlaceHolder 3"/>
           <p:cNvSpPr>
             <a:spLocks noGrp="1"/>
           </p:cNvSpPr>
@@ -905,6 +907,156 @@
 <file path=ppt/slideLayouts/slideLayout1.xml><?xml version="1.0" encoding="utf-8"?>
 <p:sldLayout xmlns:a="http://schemas.openxmlformats.org/drawingml/2006/main" xmlns:p="http://schemas.openxmlformats.org/presentationml/2006/main" xmlns:r="http://schemas.openxmlformats.org/officeDocument/2006/relationships" xmlns:p14="http://schemas.microsoft.com/office/powerpoint/2010/main" xmlns:p15="http://schemas.microsoft.com/office/powerpoint/2012/main" xmlns:mc="http://schemas.openxmlformats.org/markup-compatibility/2006" type="blank" preserve="1">
   <p:cSld name="Пустой слайд">
+    <p:spTree>
+      <p:nvGrpSpPr>
+        <p:cNvPr id="1" name=""/>
+        <p:cNvGrpSpPr/>
+        <p:nvPr/>
+      </p:nvGrpSpPr>
+      <p:grpSpPr>
+        <a:xfrm>
+          <a:off x="0" y="0"/>
+          <a:ext cx="0" cy="0"/>
+          <a:chOff x="0" y="0"/>
+          <a:chExt cx="0" cy="0"/>
+        </a:xfrm>
+      </p:grpSpPr>
+    </p:spTree>
+  </p:cSld>
+</p:sldLayout>
+</file>
+
+<file path=ppt/slideLayouts/slideLayout2.xml><?xml version="1.0" encoding="utf-8"?>
+<p:sldLayout xmlns:a="http://schemas.openxmlformats.org/drawingml/2006/main" xmlns:p="http://schemas.openxmlformats.org/presentationml/2006/main" xmlns:r="http://schemas.openxmlformats.org/officeDocument/2006/relationships" xmlns:p14="http://schemas.microsoft.com/office/powerpoint/2010/main" xmlns:p15="http://schemas.microsoft.com/office/powerpoint/2012/main" xmlns:mc="http://schemas.openxmlformats.org/markup-compatibility/2006" type="title" preserve="1">
+  <p:cSld name="Пустой слайд">
+    <p:spTree>
+      <p:nvGrpSpPr>
+        <p:cNvPr id="1" name=""/>
+        <p:cNvGrpSpPr/>
+        <p:nvPr/>
+      </p:nvGrpSpPr>
+      <p:grpSpPr>
+        <a:xfrm>
+          <a:off x="0" y="0"/>
+          <a:ext cx="0" cy="0"/>
+          <a:chOff x="0" y="0"/>
+          <a:chExt cx="0" cy="0"/>
+        </a:xfrm>
+      </p:grpSpPr>
+      <p:sp>
+        <p:nvSpPr>
+          <p:cNvPr id="4" name="PlaceHolder 1"/>
+          <p:cNvSpPr>
+            <a:spLocks noGrp="1"/>
+          </p:cNvSpPr>
+          <p:nvPr>
+            <p:ph type="title"/>
+          </p:nvPr>
+        </p:nvSpPr>
+        <p:spPr>
+          <a:xfrm>
+            <a:off x="609480" y="273600"/>
+            <a:ext cx="10972440" cy="1144800"/>
+          </a:xfrm>
+          <a:prstGeom prst="rect">
+            <a:avLst/>
+          </a:prstGeom>
+          <a:noFill/>
+          <a:ln w="0">
+            <a:noFill/>
+          </a:ln>
+        </p:spPr>
+        <p:txBody>
+          <a:bodyPr lIns="0" tIns="0" rIns="0" bIns="0" anchor="ctr">
+            <a:spAutoFit/>
+          </a:bodyPr>
+          <a:p>
+            <a:pPr indent="0" algn="l">
+              <a:buNone/>
+            </a:pPr>
+            <a:endParaRPr lang="en-US" sz="1400" b="0" u="none" strike="noStrike">
+              <a:solidFill>
+                <a:srgbClr val="000000"/>
+              </a:solidFill>
+              <a:effectLst/>
+              <a:uFillTx/>
+              <a:latin typeface="Arial"/>
+            </a:endParaRPr>
+          </a:p>
+        </p:txBody>
+      </p:sp>
+      <p:sp>
+        <p:nvSpPr>
+          <p:cNvPr id="5" name="PlaceHolder 2"/>
+          <p:cNvSpPr>
+            <a:spLocks noGrp="1"/>
+          </p:cNvSpPr>
+          <p:nvPr>
+            <p:ph type="subTitle"/>
+          </p:nvPr>
+        </p:nvSpPr>
+        <p:spPr>
+          <a:xfrm>
+            <a:off x="609480" y="1604520"/>
+            <a:ext cx="10972440" cy="3977280"/>
+          </a:xfrm>
+          <a:prstGeom prst="rect">
+            <a:avLst/>
+          </a:prstGeom>
+          <a:noFill/>
+          <a:ln w="0">
+            <a:noFill/>
+          </a:ln>
+        </p:spPr>
+        <p:txBody>
+          <a:bodyPr lIns="0" tIns="0" rIns="0" bIns="0" anchor="ctr">
+            <a:spAutoFit/>
+          </a:bodyPr>
+          <a:p>
+            <a:pPr indent="0" algn="ctr">
+              <a:buNone/>
+            </a:pPr>
+            <a:endParaRPr lang="en-US" sz="3200" b="0" u="none" strike="noStrike">
+              <a:solidFill>
+                <a:srgbClr val="000000"/>
+              </a:solidFill>
+              <a:effectLst/>
+              <a:uFillTx/>
+              <a:latin typeface="Arial"/>
+            </a:endParaRPr>
+          </a:p>
+        </p:txBody>
+      </p:sp>
+    </p:spTree>
+  </p:cSld>
+</p:sldLayout>
+</file>
+
+<file path=ppt/slideLayouts/slideLayout3.xml><?xml version="1.0" encoding="utf-8"?>
+<p:sldLayout xmlns:a="http://schemas.openxmlformats.org/drawingml/2006/main" xmlns:p="http://schemas.openxmlformats.org/presentationml/2006/main" xmlns:r="http://schemas.openxmlformats.org/officeDocument/2006/relationships" xmlns:p14="http://schemas.microsoft.com/office/powerpoint/2010/main" xmlns:p15="http://schemas.microsoft.com/office/powerpoint/2012/main" xmlns:mc="http://schemas.openxmlformats.org/markup-compatibility/2006" type="blank" preserve="1">
+  <p:cSld name="Заголовок и контакты">
+    <p:spTree>
+      <p:nvGrpSpPr>
+        <p:cNvPr id="1" name=""/>
+        <p:cNvGrpSpPr/>
+        <p:nvPr/>
+      </p:nvGrpSpPr>
+      <p:grpSpPr>
+        <a:xfrm>
+          <a:off x="0" y="0"/>
+          <a:ext cx="0" cy="0"/>
+          <a:chOff x="0" y="0"/>
+          <a:chExt cx="0" cy="0"/>
+        </a:xfrm>
+      </p:grpSpPr>
+    </p:spTree>
+  </p:cSld>
+</p:sldLayout>
+</file>
+
+<file path=ppt/slideMasters/slideMaster1.xml><?xml version="1.0" encoding="utf-8"?>
+<p:sldMaster xmlns:a="http://schemas.openxmlformats.org/drawingml/2006/main" xmlns:p="http://schemas.openxmlformats.org/presentationml/2006/main" xmlns:r="http://schemas.openxmlformats.org/officeDocument/2006/relationships" xmlns:p14="http://schemas.microsoft.com/office/powerpoint/2010/main" xmlns:p15="http://schemas.microsoft.com/office/powerpoint/2012/main" xmlns:mc="http://schemas.openxmlformats.org/markup-compatibility/2006">
+  <p:cSld>
     <p:bg>
       <p:bgPr>
         <a:solidFill>
@@ -1393,506 +1545,17 @@
       </p:sp>
     </p:spTree>
   </p:cSld>
-</p:sldLayout>
+  <p:clrMap bg1="lt1" tx1="dk1" bg2="lt2" tx2="dk2" accent1="accent1" accent2="accent2" accent3="accent3" accent4="accent4" accent5="accent5" accent6="accent6" hlink="hlink" folHlink="folHlink"/>
+  <p:sldLayoutIdLst>
+    <p:sldLayoutId id="2147483649" r:id="rId2"/>
+    <p:sldLayoutId id="2147483650" r:id="rId3"/>
+  </p:sldLayoutIdLst>
+</p:sldMaster>
 </file>
 
-<file path=ppt/slideLayouts/slideLayout2.xml><?xml version="1.0" encoding="utf-8"?>
-<p:sldLayout xmlns:a="http://schemas.openxmlformats.org/drawingml/2006/main" xmlns:p="http://schemas.openxmlformats.org/presentationml/2006/main" xmlns:r="http://schemas.openxmlformats.org/officeDocument/2006/relationships" xmlns:p14="http://schemas.microsoft.com/office/powerpoint/2010/main" xmlns:p15="http://schemas.microsoft.com/office/powerpoint/2012/main" xmlns:mc="http://schemas.openxmlformats.org/markup-compatibility/2006" type="title" preserve="1">
-  <p:cSld name="Пустой слайд">
-    <p:bg>
-      <p:bgPr>
-        <a:solidFill>
-          <a:srgbClr val="FFFFFF"/>
-        </a:solidFill>
-      </p:bgPr>
-    </p:bg>
-    <p:spTree>
-      <p:nvGrpSpPr>
-        <p:cNvPr id="1" name=""/>
-        <p:cNvGrpSpPr/>
-        <p:nvPr/>
-      </p:nvGrpSpPr>
-      <p:grpSpPr>
-        <a:xfrm>
-          <a:off x="0" y="0"/>
-          <a:ext cx="0" cy="0"/>
-          <a:chOff x="0" y="0"/>
-          <a:chExt cx="0" cy="0"/>
-        </a:xfrm>
-      </p:grpSpPr>
-      <p:sp>
-        <p:nvSpPr>
-          <p:cNvPr id="4" name="PlaceHolder 1"/>
-          <p:cNvSpPr>
-            <a:spLocks noGrp="1"/>
-          </p:cNvSpPr>
-          <p:nvPr>
-            <p:ph type="title"/>
-          </p:nvPr>
-        </p:nvSpPr>
-        <p:spPr>
-          <a:xfrm>
-            <a:off x="609480" y="273600"/>
-            <a:ext cx="10972440" cy="1144800"/>
-          </a:xfrm>
-          <a:prstGeom prst="rect">
-            <a:avLst/>
-          </a:prstGeom>
-          <a:noFill/>
-          <a:ln w="0">
-            <a:noFill/>
-          </a:ln>
-        </p:spPr>
-        <p:txBody>
-          <a:bodyPr lIns="0" tIns="0" rIns="0" bIns="0" anchor="ctr">
-            <a:noAutofit/>
-          </a:bodyPr>
-          <a:lstStyle>
-            <a:lvl1pPr indent="0" algn="l">
-              <a:buNone/>
-              <a:defRPr lang="en-US" sz="1400" b="0" u="none" strike="noStrike">
-                <a:solidFill>
-                  <a:srgbClr val="000000"/>
-                </a:solidFill>
-                <a:effectLst/>
-                <a:uFillTx/>
-                <a:latin typeface="Arial"/>
-              </a:defRPr>
-            </a:lvl1pPr>
-          </a:lstStyle>
-          <a:p>
-            <a:pPr indent="0" algn="l">
-              <a:buNone/>
-            </a:pPr>
-            <a:r>
-              <a:rPr lang="en-US" sz="1400" b="0" u="none" strike="noStrike">
-                <a:solidFill>
-                  <a:srgbClr val="000000"/>
-                </a:solidFill>
-                <a:effectLst/>
-                <a:uFillTx/>
-                <a:latin typeface="Arial"/>
-              </a:rPr>
-              <a:t>Для правки текста заглавия щёлкните мышью</a:t>
-            </a:r>
-            <a:endParaRPr lang="en-US" sz="1400" b="0" u="none" strike="noStrike">
-              <a:solidFill>
-                <a:srgbClr val="000000"/>
-              </a:solidFill>
-              <a:effectLst/>
-              <a:uFillTx/>
-              <a:latin typeface="Arial"/>
-            </a:endParaRPr>
-          </a:p>
-        </p:txBody>
-      </p:sp>
-      <p:sp>
-        <p:nvSpPr>
-          <p:cNvPr id="5" name="PlaceHolder 2"/>
-          <p:cNvSpPr>
-            <a:spLocks noGrp="1"/>
-          </p:cNvSpPr>
-          <p:nvPr>
-            <p:ph type="body"/>
-          </p:nvPr>
-        </p:nvSpPr>
-        <p:spPr>
-          <a:xfrm>
-            <a:off x="609480" y="1604520"/>
-            <a:ext cx="10972440" cy="3977280"/>
-          </a:xfrm>
-          <a:prstGeom prst="rect">
-            <a:avLst/>
-          </a:prstGeom>
-          <a:noFill/>
-          <a:ln w="0">
-            <a:noFill/>
-          </a:ln>
-        </p:spPr>
-        <p:txBody>
-          <a:bodyPr lIns="0" tIns="0" rIns="0" bIns="0" anchor="t">
-            <a:normAutofit/>
-          </a:bodyPr>
-          <a:lstStyle>
-            <a:lvl1pPr algn="l">
-              <a:spcBef>
-                <a:spcPts val="1417"/>
-              </a:spcBef>
-              <a:buClr>
-                <a:srgbClr val="000000"/>
-              </a:buClr>
-              <a:buSzPct val="45000"/>
-              <a:buFont typeface="Wingdings" charset="2"/>
-              <a:buChar char=""/>
-              <a:defRPr lang="en-US" sz="1400" b="0" u="none" strike="noStrike">
-                <a:solidFill>
-                  <a:srgbClr val="000000"/>
-                </a:solidFill>
-                <a:effectLst/>
-                <a:uFillTx/>
-                <a:latin typeface="Arial"/>
-              </a:defRPr>
-            </a:lvl1pPr>
-            <a:lvl2pPr lvl="1" algn="l">
-              <a:spcBef>
-                <a:spcPts val="1134"/>
-              </a:spcBef>
-              <a:buClr>
-                <a:srgbClr val="000000"/>
-              </a:buClr>
-              <a:buSzPct val="75000"/>
-              <a:buFont typeface="Symbol" charset="2"/>
-              <a:buChar char=""/>
-              <a:defRPr lang="en-US" sz="1400" b="0" u="none" strike="noStrike">
-                <a:solidFill>
-                  <a:srgbClr val="000000"/>
-                </a:solidFill>
-                <a:effectLst/>
-                <a:uFillTx/>
-                <a:latin typeface="Arial"/>
-              </a:defRPr>
-            </a:lvl2pPr>
-            <a:lvl3pPr lvl="2" algn="l">
-              <a:spcBef>
-                <a:spcPts val="850"/>
-              </a:spcBef>
-              <a:buClr>
-                <a:srgbClr val="000000"/>
-              </a:buClr>
-              <a:buSzPct val="45000"/>
-              <a:buFont typeface="Wingdings" charset="2"/>
-              <a:buChar char=""/>
-              <a:defRPr lang="en-US" sz="1400" b="0" u="none" strike="noStrike">
-                <a:solidFill>
-                  <a:srgbClr val="000000"/>
-                </a:solidFill>
-                <a:effectLst/>
-                <a:uFillTx/>
-                <a:latin typeface="Arial"/>
-              </a:defRPr>
-            </a:lvl3pPr>
-            <a:lvl4pPr lvl="3" algn="l">
-              <a:spcBef>
-                <a:spcPts val="567"/>
-              </a:spcBef>
-              <a:buClr>
-                <a:srgbClr val="000000"/>
-              </a:buClr>
-              <a:buSzPct val="75000"/>
-              <a:buFont typeface="Symbol" charset="2"/>
-              <a:buChar char=""/>
-              <a:defRPr lang="en-US" sz="1400" b="0" u="none" strike="noStrike">
-                <a:solidFill>
-                  <a:srgbClr val="000000"/>
-                </a:solidFill>
-                <a:effectLst/>
-                <a:uFillTx/>
-                <a:latin typeface="Arial"/>
-              </a:defRPr>
-            </a:lvl4pPr>
-            <a:lvl5pPr lvl="4" algn="l">
-              <a:spcBef>
-                <a:spcPts val="283"/>
-              </a:spcBef>
-              <a:buClr>
-                <a:srgbClr val="000000"/>
-              </a:buClr>
-              <a:buSzPct val="45000"/>
-              <a:buFont typeface="Wingdings" charset="2"/>
-              <a:buChar char=""/>
-              <a:defRPr lang="en-US" sz="2000" b="0" u="none" strike="noStrike">
-                <a:solidFill>
-                  <a:srgbClr val="000000"/>
-                </a:solidFill>
-                <a:effectLst/>
-                <a:uFillTx/>
-                <a:latin typeface="Arial"/>
-              </a:defRPr>
-            </a:lvl5pPr>
-            <a:lvl6pPr lvl="5" algn="l">
-              <a:spcBef>
-                <a:spcPts val="283"/>
-              </a:spcBef>
-              <a:buClr>
-                <a:srgbClr val="000000"/>
-              </a:buClr>
-              <a:buSzPct val="45000"/>
-              <a:buFont typeface="Wingdings" charset="2"/>
-              <a:buChar char=""/>
-              <a:defRPr lang="en-US" sz="2000" b="0" u="none" strike="noStrike">
-                <a:solidFill>
-                  <a:srgbClr val="000000"/>
-                </a:solidFill>
-                <a:effectLst/>
-                <a:uFillTx/>
-                <a:latin typeface="Arial"/>
-              </a:defRPr>
-            </a:lvl6pPr>
-            <a:lvl7pPr lvl="6" algn="l">
-              <a:spcBef>
-                <a:spcPts val="283"/>
-              </a:spcBef>
-              <a:buClr>
-                <a:srgbClr val="000000"/>
-              </a:buClr>
-              <a:buSzPct val="45000"/>
-              <a:buFont typeface="Wingdings" charset="2"/>
-              <a:buChar char=""/>
-              <a:defRPr lang="en-US" sz="2000" b="0" u="none" strike="noStrike">
-                <a:solidFill>
-                  <a:srgbClr val="000000"/>
-                </a:solidFill>
-                <a:effectLst/>
-                <a:uFillTx/>
-                <a:latin typeface="Arial"/>
-              </a:defRPr>
-            </a:lvl7pPr>
-          </a:lstStyle>
-          <a:p>
-            <a:pPr marL="432000" indent="-324000" algn="l">
-              <a:spcBef>
-                <a:spcPts val="1417"/>
-              </a:spcBef>
-              <a:buClr>
-                <a:srgbClr val="000000"/>
-              </a:buClr>
-              <a:buSzPct val="45000"/>
-              <a:buFont typeface="Wingdings" charset="2"/>
-              <a:buChar char=""/>
-            </a:pPr>
-            <a:r>
-              <a:rPr lang="en-US" sz="1400" b="0" u="none" strike="noStrike">
-                <a:solidFill>
-                  <a:srgbClr val="000000"/>
-                </a:solidFill>
-                <a:effectLst/>
-                <a:uFillTx/>
-                <a:latin typeface="Arial"/>
-              </a:rPr>
-              <a:t>Для правки структуры щёлкните мышью</a:t>
-            </a:r>
-            <a:endParaRPr lang="en-US" sz="1400" b="0" u="none" strike="noStrike">
-              <a:solidFill>
-                <a:srgbClr val="000000"/>
-              </a:solidFill>
-              <a:effectLst/>
-              <a:uFillTx/>
-              <a:latin typeface="Arial"/>
-            </a:endParaRPr>
-          </a:p>
-          <a:p>
-            <a:pPr marL="864000" lvl="1" indent="-324000" algn="l">
-              <a:spcBef>
-                <a:spcPts val="1134"/>
-              </a:spcBef>
-              <a:buClr>
-                <a:srgbClr val="000000"/>
-              </a:buClr>
-              <a:buSzPct val="75000"/>
-              <a:buFont typeface="Symbol" charset="2"/>
-              <a:buChar char=""/>
-            </a:pPr>
-            <a:r>
-              <a:rPr lang="en-US" sz="1400" b="0" u="none" strike="noStrike">
-                <a:solidFill>
-                  <a:srgbClr val="000000"/>
-                </a:solidFill>
-                <a:effectLst/>
-                <a:uFillTx/>
-                <a:latin typeface="Arial"/>
-              </a:rPr>
-              <a:t>Второй уровень структуры</a:t>
-            </a:r>
-            <a:endParaRPr lang="en-US" sz="1400" b="0" u="none" strike="noStrike">
-              <a:solidFill>
-                <a:srgbClr val="000000"/>
-              </a:solidFill>
-              <a:effectLst/>
-              <a:uFillTx/>
-              <a:latin typeface="Arial"/>
-            </a:endParaRPr>
-          </a:p>
-          <a:p>
-            <a:pPr marL="1296000" lvl="2" indent="-288000" algn="l">
-              <a:spcBef>
-                <a:spcPts val="850"/>
-              </a:spcBef>
-              <a:buClr>
-                <a:srgbClr val="000000"/>
-              </a:buClr>
-              <a:buSzPct val="45000"/>
-              <a:buFont typeface="Wingdings" charset="2"/>
-              <a:buChar char=""/>
-            </a:pPr>
-            <a:r>
-              <a:rPr lang="en-US" sz="1400" b="0" u="none" strike="noStrike">
-                <a:solidFill>
-                  <a:srgbClr val="000000"/>
-                </a:solidFill>
-                <a:effectLst/>
-                <a:uFillTx/>
-                <a:latin typeface="Arial"/>
-              </a:rPr>
-              <a:t>Третий уровень структуры</a:t>
-            </a:r>
-            <a:endParaRPr lang="en-US" sz="1400" b="0" u="none" strike="noStrike">
-              <a:solidFill>
-                <a:srgbClr val="000000"/>
-              </a:solidFill>
-              <a:effectLst/>
-              <a:uFillTx/>
-              <a:latin typeface="Arial"/>
-            </a:endParaRPr>
-          </a:p>
-          <a:p>
-            <a:pPr marL="1728000" lvl="3" indent="-216000" algn="l">
-              <a:spcBef>
-                <a:spcPts val="567"/>
-              </a:spcBef>
-              <a:buClr>
-                <a:srgbClr val="000000"/>
-              </a:buClr>
-              <a:buSzPct val="75000"/>
-              <a:buFont typeface="Symbol" charset="2"/>
-              <a:buChar char=""/>
-            </a:pPr>
-            <a:r>
-              <a:rPr lang="en-US" sz="1400" b="0" u="none" strike="noStrike">
-                <a:solidFill>
-                  <a:srgbClr val="000000"/>
-                </a:solidFill>
-                <a:effectLst/>
-                <a:uFillTx/>
-                <a:latin typeface="Arial"/>
-              </a:rPr>
-              <a:t>Четвёртый уровень структуры</a:t>
-            </a:r>
-            <a:endParaRPr lang="en-US" sz="1400" b="0" u="none" strike="noStrike">
-              <a:solidFill>
-                <a:srgbClr val="000000"/>
-              </a:solidFill>
-              <a:effectLst/>
-              <a:uFillTx/>
-              <a:latin typeface="Arial"/>
-            </a:endParaRPr>
-          </a:p>
-          <a:p>
-            <a:pPr marL="2160000" lvl="4" indent="-216000" algn="l">
-              <a:spcBef>
-                <a:spcPts val="283"/>
-              </a:spcBef>
-              <a:buClr>
-                <a:srgbClr val="000000"/>
-              </a:buClr>
-              <a:buSzPct val="45000"/>
-              <a:buFont typeface="Wingdings" charset="2"/>
-              <a:buChar char=""/>
-            </a:pPr>
-            <a:r>
-              <a:rPr lang="en-US" sz="2000" b="0" u="none" strike="noStrike">
-                <a:solidFill>
-                  <a:srgbClr val="000000"/>
-                </a:solidFill>
-                <a:effectLst/>
-                <a:uFillTx/>
-                <a:latin typeface="Arial"/>
-              </a:rPr>
-              <a:t>Пятый уровень структуры</a:t>
-            </a:r>
-            <a:endParaRPr lang="en-US" sz="2000" b="0" u="none" strike="noStrike">
-              <a:solidFill>
-                <a:srgbClr val="000000"/>
-              </a:solidFill>
-              <a:effectLst/>
-              <a:uFillTx/>
-              <a:latin typeface="Arial"/>
-            </a:endParaRPr>
-          </a:p>
-          <a:p>
-            <a:pPr marL="2592000" lvl="5" indent="-216000" algn="l">
-              <a:spcBef>
-                <a:spcPts val="283"/>
-              </a:spcBef>
-              <a:buClr>
-                <a:srgbClr val="000000"/>
-              </a:buClr>
-              <a:buSzPct val="45000"/>
-              <a:buFont typeface="Wingdings" charset="2"/>
-              <a:buChar char=""/>
-            </a:pPr>
-            <a:r>
-              <a:rPr lang="en-US" sz="2000" b="0" u="none" strike="noStrike">
-                <a:solidFill>
-                  <a:srgbClr val="000000"/>
-                </a:solidFill>
-                <a:effectLst/>
-                <a:uFillTx/>
-                <a:latin typeface="Arial"/>
-              </a:rPr>
-              <a:t>Шестой уровень структуры</a:t>
-            </a:r>
-            <a:endParaRPr lang="en-US" sz="2000" b="0" u="none" strike="noStrike">
-              <a:solidFill>
-                <a:srgbClr val="000000"/>
-              </a:solidFill>
-              <a:effectLst/>
-              <a:uFillTx/>
-              <a:latin typeface="Arial"/>
-            </a:endParaRPr>
-          </a:p>
-          <a:p>
-            <a:pPr marL="3024000" lvl="6" indent="-216000" algn="l">
-              <a:spcBef>
-                <a:spcPts val="283"/>
-              </a:spcBef>
-              <a:buClr>
-                <a:srgbClr val="000000"/>
-              </a:buClr>
-              <a:buSzPct val="45000"/>
-              <a:buFont typeface="Wingdings" charset="2"/>
-              <a:buChar char=""/>
-            </a:pPr>
-            <a:r>
-              <a:rPr lang="en-US" sz="2000" b="0" u="none" strike="noStrike">
-                <a:solidFill>
-                  <a:srgbClr val="000000"/>
-                </a:solidFill>
-                <a:effectLst/>
-                <a:uFillTx/>
-                <a:latin typeface="Arial"/>
-              </a:rPr>
-              <a:t>Седьмой уровень </a:t>
-            </a:r>
-            <a:r>
-              <a:rPr lang="en-US" sz="2000" b="0" u="none" strike="noStrike">
-                <a:solidFill>
-                  <a:srgbClr val="000000"/>
-                </a:solidFill>
-                <a:effectLst/>
-                <a:uFillTx/>
-                <a:latin typeface="Arial"/>
-              </a:rPr>
-              <a:t>структуры</a:t>
-            </a:r>
-            <a:endParaRPr lang="en-US" sz="2000" b="0" u="none" strike="noStrike">
-              <a:solidFill>
-                <a:srgbClr val="000000"/>
-              </a:solidFill>
-              <a:effectLst/>
-              <a:uFillTx/>
-              <a:latin typeface="Arial"/>
-            </a:endParaRPr>
-          </a:p>
-        </p:txBody>
-      </p:sp>
-    </p:spTree>
-  </p:cSld>
-</p:sldLayout>
-</file>
-
-<file path=ppt/slideLayouts/slideLayout3.xml><?xml version="1.0" encoding="utf-8"?>
-<p:sldLayout xmlns:a="http://schemas.openxmlformats.org/drawingml/2006/main" xmlns:p="http://schemas.openxmlformats.org/presentationml/2006/main" xmlns:r="http://schemas.openxmlformats.org/officeDocument/2006/relationships" xmlns:p14="http://schemas.microsoft.com/office/powerpoint/2010/main" xmlns:p15="http://schemas.microsoft.com/office/powerpoint/2012/main" xmlns:mc="http://schemas.openxmlformats.org/markup-compatibility/2006" type="blank" preserve="1">
-  <p:cSld name="Заголовок и контакты">
+<file path=ppt/slideMasters/slideMaster2.xml><?xml version="1.0" encoding="utf-8"?>
+<p:sldMaster xmlns:a="http://schemas.openxmlformats.org/drawingml/2006/main" xmlns:p="http://schemas.openxmlformats.org/presentationml/2006/main" xmlns:r="http://schemas.openxmlformats.org/officeDocument/2006/relationships" xmlns:p14="http://schemas.microsoft.com/office/powerpoint/2010/main" xmlns:p15="http://schemas.microsoft.com/office/powerpoint/2012/main" xmlns:mc="http://schemas.openxmlformats.org/markup-compatibility/2006">
+  <p:cSld>
     <p:bg>
       <p:bgPr>
         <a:solidFill>
@@ -3664,18 +3327,7 @@
                 <a:uFillTx/>
                 <a:latin typeface="Arial"/>
               </a:rPr>
-              <a:t>Седьмой уровень </a:t>
-            </a:r>
-            <a:r>
-              <a:rPr lang="en-US" sz="2000" b="0" u="none" strike="noStrike">
-                <a:solidFill>
-                  <a:srgbClr val="000000"/>
-                </a:solidFill>
-                <a:effectLst/>
-                <a:uFillTx/>
-                <a:latin typeface="Arial"/>
-              </a:rPr>
-              <a:t>структуры</a:t>
+              <a:t>Седьмой уровень структуры</a:t>
             </a:r>
             <a:endParaRPr lang="en-US" sz="2000" b="0" u="none" strike="noStrike">
               <a:solidFill>
@@ -4063,18 +3715,7 @@
                 <a:uFillTx/>
                 <a:latin typeface="Arial"/>
               </a:rPr>
-              <a:t>Седьмой уровень </a:t>
-            </a:r>
-            <a:r>
-              <a:rPr lang="en-US" sz="2000" b="0" u="none" strike="noStrike">
-                <a:solidFill>
-                  <a:srgbClr val="000000"/>
-                </a:solidFill>
-                <a:effectLst/>
-                <a:uFillTx/>
-                <a:latin typeface="Arial"/>
-              </a:rPr>
-              <a:t>структуры</a:t>
+              <a:t>Седьмой уровень структуры</a:t>
             </a:r>
             <a:endParaRPr lang="en-US" sz="2000" b="0" u="none" strike="noStrike">
               <a:solidFill>
@@ -4543,33 +4184,9 @@
       </p:sp>
     </p:spTree>
   </p:cSld>
-</p:sldLayout>
-</file>
-
-<file path=ppt/slideMasters/slideMaster1.xml><?xml version="1.0" encoding="utf-8"?>
-<p:sldMaster xmlns:a="http://schemas.openxmlformats.org/drawingml/2006/main" xmlns:p="http://schemas.openxmlformats.org/presentationml/2006/main" xmlns:r="http://schemas.openxmlformats.org/officeDocument/2006/relationships" xmlns:p14="http://schemas.microsoft.com/office/powerpoint/2010/main" xmlns:p15="http://schemas.microsoft.com/office/powerpoint/2012/main" xmlns:mc="http://schemas.openxmlformats.org/markup-compatibility/2006">
-  <p:cSld>
-    <p:spTree>
-      <p:nvGrpSpPr>
-        <p:cNvPr id="1" name=""/>
-        <p:cNvGrpSpPr/>
-        <p:nvPr/>
-      </p:nvGrpSpPr>
-      <p:grpSpPr>
-        <a:xfrm>
-          <a:off x="0" y="0"/>
-          <a:ext cx="0" cy="0"/>
-          <a:chOff x="0" y="0"/>
-          <a:chExt cx="0" cy="0"/>
-        </a:xfrm>
-      </p:grpSpPr>
-    </p:spTree>
-  </p:cSld>
   <p:clrMap bg1="lt1" tx1="dk1" bg2="lt2" tx2="dk2" accent1="accent1" accent2="accent2" accent3="accent3" accent4="accent4" accent5="accent5" accent6="accent6" hlink="hlink" folHlink="folHlink"/>
   <p:sldLayoutIdLst>
-    <p:sldLayoutId id="2147483649" r:id="rId2"/>
-    <p:sldLayoutId id="2147483650" r:id="rId3"/>
-    <p:sldLayoutId id="2147483651" r:id="rId4"/>
+    <p:sldLayoutId id="2147483652" r:id="rId3"/>
   </p:sldLayoutIdLst>
 </p:sldMaster>
 </file>
@@ -4899,7 +4516,243 @@
       </p:grpSpPr>
       <p:pic>
         <p:nvPicPr>
-          <p:cNvPr id="101" name="Google Shape;320;p31"/>
+          <p:cNvPr id="101" name="Google Shape;302;p29"/>
+          <p:cNvPicPr/>
+          <p:nvPr/>
+        </p:nvPicPr>
+        <p:blipFill>
+          <a:blip r:embed="rId1"/>
+          <a:stretch/>
+        </p:blipFill>
+        <p:spPr>
+          <a:xfrm>
+            <a:off x="48240" y="0"/>
+            <a:ext cx="12191760" cy="6857640"/>
+          </a:xfrm>
+          <a:prstGeom prst="rect">
+            <a:avLst/>
+          </a:prstGeom>
+          <a:noFill/>
+          <a:ln w="0">
+            <a:noFill/>
+          </a:ln>
+        </p:spPr>
+      </p:pic>
+      <p:sp>
+        <p:nvSpPr>
+          <p:cNvPr id="102" name="Google Shape;303;p29"/>
+          <p:cNvSpPr/>
+          <p:nvPr/>
+        </p:nvSpPr>
+        <p:spPr>
+          <a:xfrm>
+            <a:off x="719640" y="348840"/>
+            <a:ext cx="10752120" cy="500040"/>
+          </a:xfrm>
+          <a:prstGeom prst="rect">
+            <a:avLst/>
+          </a:prstGeom>
+          <a:noFill/>
+          <a:ln w="0">
+            <a:noFill/>
+          </a:ln>
+        </p:spPr>
+        <p:style>
+          <a:lnRef idx="0"/>
+          <a:fillRef idx="0"/>
+          <a:effectRef idx="0"/>
+          <a:fontRef idx="minor"/>
+        </p:style>
+        <p:txBody>
+          <a:bodyPr lIns="0" tIns="0" rIns="0" bIns="0" anchor="ctr">
+            <a:noAutofit/>
+          </a:bodyPr>
+          <a:p>
+            <a:pPr>
+              <a:lnSpc>
+                <a:spcPct val="90000"/>
+              </a:lnSpc>
+              <a:tabLst>
+                <a:tab pos="0" algn="l"/>
+              </a:tabLst>
+            </a:pPr>
+            <a:r>
+              <a:rPr lang="en-US" sz="4500" b="1" u="none" strike="noStrike">
+                <a:solidFill>
+                  <a:srgbClr val="FFFFFF"/>
+                </a:solidFill>
+                <a:effectLst/>
+                <a:uFillTx/>
+                <a:latin typeface="Roboto"/>
+                <a:ea typeface="Roboto"/>
+              </a:rPr>
+              <a:t>Результаты</a:t>
+            </a:r>
+            <a:endParaRPr lang="en-US" sz="4500" b="0" u="none" strike="noStrike">
+              <a:solidFill>
+                <a:srgbClr val="000000"/>
+              </a:solidFill>
+              <a:effectLst/>
+              <a:uFillTx/>
+              <a:latin typeface="Arial"/>
+            </a:endParaRPr>
+          </a:p>
+        </p:txBody>
+      </p:sp>
+      <p:sp>
+        <p:nvSpPr>
+          <p:cNvPr id="103" name="Google Shape;297;p 4"/>
+          <p:cNvSpPr/>
+          <p:nvPr/>
+        </p:nvSpPr>
+        <p:spPr>
+          <a:xfrm>
+            <a:off x="180000" y="1265760"/>
+            <a:ext cx="11520000" cy="5131440"/>
+          </a:xfrm>
+          <a:prstGeom prst="rect">
+            <a:avLst/>
+          </a:prstGeom>
+          <a:noFill/>
+          <a:ln w="0">
+            <a:noFill/>
+          </a:ln>
+        </p:spPr>
+        <p:style>
+          <a:lnRef idx="0"/>
+          <a:fillRef idx="0"/>
+          <a:effectRef idx="0"/>
+          <a:fontRef idx="minor"/>
+        </p:style>
+        <p:txBody>
+          <a:bodyPr tIns="91440" bIns="91440" anchor="t">
+            <a:noAutofit/>
+          </a:bodyPr>
+          <a:p>
+            <a:pPr>
+              <a:lnSpc>
+                <a:spcPct val="100000"/>
+              </a:lnSpc>
+              <a:tabLst>
+                <a:tab pos="0" algn="l"/>
+              </a:tabLst>
+            </a:pPr>
+            <a:endParaRPr lang="en-US" sz="2400" b="0" u="none" strike="noStrike">
+              <a:solidFill>
+                <a:srgbClr val="000000"/>
+              </a:solidFill>
+              <a:effectLst/>
+              <a:uFillTx/>
+              <a:latin typeface="Arial"/>
+            </a:endParaRPr>
+          </a:p>
+          <a:p>
+            <a:pPr>
+              <a:lnSpc>
+                <a:spcPct val="100000"/>
+              </a:lnSpc>
+              <a:tabLst>
+                <a:tab pos="0" algn="l"/>
+              </a:tabLst>
+            </a:pPr>
+            <a:endParaRPr lang="en-US" sz="2800" b="0" u="none" strike="noStrike">
+              <a:solidFill>
+                <a:srgbClr val="000000"/>
+              </a:solidFill>
+              <a:effectLst/>
+              <a:uFillTx/>
+              <a:latin typeface="Arial"/>
+            </a:endParaRPr>
+          </a:p>
+          <a:p>
+            <a:pPr>
+              <a:lnSpc>
+                <a:spcPct val="100000"/>
+              </a:lnSpc>
+              <a:tabLst>
+                <a:tab pos="0" algn="l"/>
+              </a:tabLst>
+            </a:pPr>
+            <a:r>
+              <a:rPr lang="en-US" sz="1700" b="0" u="none" strike="noStrike">
+                <a:solidFill>
+                  <a:srgbClr val="1D1C1D"/>
+                </a:solidFill>
+                <a:effectLst/>
+                <a:uFillTx/>
+                <a:latin typeface="Roboto"/>
+                <a:ea typeface="Roboto"/>
+              </a:rPr>
+              <a:t> </a:t>
+            </a:r>
+            <a:endParaRPr lang="en-US" sz="1700" b="0" u="none" strike="noStrike">
+              <a:solidFill>
+                <a:srgbClr val="000000"/>
+              </a:solidFill>
+              <a:effectLst/>
+              <a:uFillTx/>
+              <a:latin typeface="Arial"/>
+            </a:endParaRPr>
+          </a:p>
+        </p:txBody>
+      </p:sp>
+      <p:pic>
+        <p:nvPicPr>
+          <p:cNvPr id="104" name=""/>
+          <p:cNvPicPr/>
+          <p:nvPr/>
+        </p:nvPicPr>
+        <p:blipFill>
+          <a:blip r:embed="rId2"/>
+          <a:stretch/>
+        </p:blipFill>
+        <p:spPr>
+          <a:xfrm>
+            <a:off x="4453920" y="180000"/>
+            <a:ext cx="5266080" cy="6400080"/>
+          </a:xfrm>
+          <a:prstGeom prst="rect">
+            <a:avLst/>
+          </a:prstGeom>
+          <a:noFill/>
+          <a:ln w="0">
+            <a:noFill/>
+          </a:ln>
+        </p:spPr>
+      </p:pic>
+    </p:spTree>
+  </p:cSld>
+  <mc:AlternateContent>
+    <mc:Choice Requires="p14">
+      <p:transition spd="slow" p14:dur="2000"/>
+    </mc:Choice>
+    <mc:Fallback>
+      <p:transition spd="slow"/>
+    </mc:Fallback>
+  </mc:AlternateContent>
+</p:sld>
+</file>
+
+<file path=ppt/slides/slide11.xml><?xml version="1.0" encoding="utf-8"?>
+<p:sld xmlns:a="http://schemas.openxmlformats.org/drawingml/2006/main" xmlns:p="http://schemas.openxmlformats.org/presentationml/2006/main" xmlns:r="http://schemas.openxmlformats.org/officeDocument/2006/relationships" xmlns:p14="http://schemas.microsoft.com/office/powerpoint/2010/main" xmlns:p15="http://schemas.microsoft.com/office/powerpoint/2012/main" xmlns:mc="http://schemas.openxmlformats.org/markup-compatibility/2006">
+  <p:cSld>
+    <p:spTree>
+      <p:nvGrpSpPr>
+        <p:cNvPr id="1" name=""/>
+        <p:cNvGrpSpPr/>
+        <p:nvPr/>
+      </p:nvGrpSpPr>
+      <p:grpSpPr>
+        <a:xfrm>
+          <a:off x="0" y="0"/>
+          <a:ext cx="0" cy="0"/>
+          <a:chOff x="0" y="0"/>
+          <a:chExt cx="0" cy="0"/>
+        </a:xfrm>
+      </p:grpSpPr>
+      <p:pic>
+        <p:nvPicPr>
+          <p:cNvPr id="105" name="Google Shape;320;p31"/>
           <p:cNvPicPr/>
           <p:nvPr/>
         </p:nvPicPr>
@@ -4923,7 +4776,7 @@
       </p:pic>
       <p:sp>
         <p:nvSpPr>
-          <p:cNvPr id="102" name="Google Shape;321;p31"/>
+          <p:cNvPr id="106" name="Google Shape;321;p31"/>
           <p:cNvSpPr/>
           <p:nvPr/>
         </p:nvSpPr>
@@ -4978,7 +4831,7 @@
       </p:sp>
       <p:sp>
         <p:nvSpPr>
-          <p:cNvPr id="103" name="Google Shape;322;p31"/>
+          <p:cNvPr id="107" name="Google Shape;322;p31"/>
           <p:cNvSpPr/>
           <p:nvPr/>
         </p:nvSpPr>
@@ -5033,7 +4886,7 @@
       </p:sp>
       <p:sp>
         <p:nvSpPr>
-          <p:cNvPr id="104" name="Google Shape;323;p31"/>
+          <p:cNvPr id="108" name="Google Shape;323;p31"/>
           <p:cNvSpPr/>
           <p:nvPr/>
         </p:nvSpPr>
@@ -5059,7 +4912,7 @@
           <a:fontRef idx="minor"/>
         </p:style>
         <p:txBody>
-          <a:bodyPr lIns="45000" tIns="22320" rIns="45000" bIns="22320" anchor="ctr">
+          <a:bodyPr lIns="45000" tIns="22320" rIns="45000" bIns="22320" anchor="ctr" anchorCtr="1">
             <a:noAutofit/>
           </a:bodyPr>
           <a:p>
@@ -5081,24 +4934,24 @@
                 <a:latin typeface="Roboto"/>
                 <a:ea typeface="Roboto"/>
               </a:rPr>
-              <a:t>Спасибо за </a:t>
-            </a:r>
-            <a:r>
-              <a:rPr lang="en-US" sz="5000" b="0" u="none" strike="noStrike">
-                <a:solidFill>
-                  <a:srgbClr val="FFFFFF"/>
-                </a:solidFill>
-                <a:effectLst/>
-                <a:uFillTx/>
-                <a:latin typeface="Roboto"/>
-                <a:ea typeface="Roboto"/>
-              </a:rPr>
-              <a:t>внимание!</a:t>
+              <a:t>Спасибо за внимание!</a:t>
             </a:r>
             <a:br>
               <a:rPr sz="5000"/>
             </a:br>
-            <a:endParaRPr lang="en-US" sz="5000" b="0" u="none" strike="noStrike">
+            <a:r>
+              <a:rPr lang="en-US" sz="2800" b="0" u="none" strike="noStrike">
+                <a:solidFill>
+                  <a:srgbClr val="FFFFFF"/>
+                </a:solidFill>
+                <a:effectLst/>
+                <a:uFillTx/>
+                <a:latin typeface="Roboto"/>
+                <a:ea typeface="Roboto"/>
+              </a:rPr>
+              <a:t>https://github.com/gyngazov/otus-c-2026-01/tree/project/HW</a:t>
+            </a:r>
+            <a:endParaRPr lang="en-US" sz="2800" b="0" u="none" strike="noStrike">
               <a:solidFill>
                 <a:srgbClr val="000000"/>
               </a:solidFill>
@@ -5111,7 +4964,7 @@
       </p:sp>
       <p:sp>
         <p:nvSpPr>
-          <p:cNvPr id="105" name="PlaceHolder 1"/>
+          <p:cNvPr id="109" name="PlaceHolder 1"/>
           <p:cNvSpPr>
             <a:spLocks noGrp="1"/>
           </p:cNvSpPr>
@@ -5171,7 +5024,7 @@
       </p:sp>
       <p:sp>
         <p:nvSpPr>
-          <p:cNvPr id="106" name="PlaceHolder 2"/>
+          <p:cNvPr id="110" name="PlaceHolder 2"/>
           <p:cNvSpPr>
             <a:spLocks noGrp="1"/>
           </p:cNvSpPr>
@@ -5231,7 +5084,7 @@
       </p:sp>
       <p:sp>
         <p:nvSpPr>
-          <p:cNvPr id="107" name="PlaceHolder 3"/>
+          <p:cNvPr id="111" name="PlaceHolder 3"/>
           <p:cNvSpPr>
             <a:spLocks noGrp="1"/>
           </p:cNvSpPr>
@@ -5303,7 +5156,7 @@
       </p:sp>
       <p:sp>
         <p:nvSpPr>
-          <p:cNvPr id="108" name="PlaceHolder 4"/>
+          <p:cNvPr id="112" name="PlaceHolder 4"/>
           <p:cNvSpPr>
             <a:spLocks noGrp="1"/>
           </p:cNvSpPr>
@@ -5847,19 +5700,7 @@
                 <a:latin typeface="Roboto"/>
                 <a:ea typeface="Roboto"/>
               </a:rPr>
-              <a:t>МИГРАЦИЯ ТАБЛИЦЫ В </a:t>
-            </a:r>
-            <a:r>
-              <a:rPr lang="en-US" sz="3200" b="1" u="none" strike="noStrike">
-                <a:solidFill>
-                  <a:srgbClr val="FFFFFF"/>
-                </a:solidFill>
-                <a:effectLst/>
-                <a:uFillTx/>
-                <a:latin typeface="Roboto"/>
-                <a:ea typeface="Roboto"/>
-              </a:rPr>
-              <a:t>АСИНХРОННОМ РЕЖИМЕ</a:t>
+              <a:t>МИГРАЦИЯ ТАБЛИЦЫ В АСИНХРОННОМ РЕЖИМЕ</a:t>
             </a:r>
             <a:endParaRPr lang="en-US" sz="3200" b="0" u="none" strike="noStrike">
               <a:solidFill>
@@ -6420,14 +6261,6 @@
               <a:noAutofit/>
             </a:bodyPr>
             <a:p>
-              <a:pPr algn="ctr">
-                <a:lnSpc>
-                  <a:spcPct val="100000"/>
-                </a:lnSpc>
-                <a:tabLst>
-                  <a:tab pos="0" algn="l"/>
-                </a:tabLst>
-              </a:pPr>
               <a:endParaRPr lang="en-US" sz="1400" b="0" u="none" strike="noStrike">
                 <a:solidFill>
                   <a:srgbClr val="000000"/>
@@ -7140,14 +6973,6 @@
               <a:noAutofit/>
             </a:bodyPr>
             <a:p>
-              <a:pPr algn="ctr">
-                <a:lnSpc>
-                  <a:spcPct val="90000"/>
-                </a:lnSpc>
-                <a:tabLst>
-                  <a:tab pos="0" algn="l"/>
-                </a:tabLst>
-              </a:pPr>
               <a:endParaRPr lang="en-US" sz="1400" b="0" u="none" strike="noStrike">
                 <a:solidFill>
                   <a:srgbClr val="000000"/>
@@ -8233,19 +8058,7 @@
                 <a:latin typeface="Roboto"/>
                 <a:ea typeface="Roboto"/>
               </a:rPr>
-              <a:t>числом потоков </a:t>
-            </a:r>
-            <a:r>
-              <a:rPr lang="en-US" sz="1700" b="0" u="none" strike="noStrike">
-                <a:solidFill>
-                  <a:srgbClr val="1D1C1D"/>
-                </a:solidFill>
-                <a:effectLst/>
-                <a:uFillTx/>
-                <a:latin typeface="Roboto"/>
-                <a:ea typeface="Roboto"/>
-              </a:rPr>
-              <a:t>записи</a:t>
+              <a:t>числом потоков записи</a:t>
             </a:r>
             <a:endParaRPr lang="en-US" sz="1700" b="0" u="none" strike="noStrike">
               <a:solidFill>
@@ -8884,14 +8697,6 @@
             <a:noAutofit/>
           </a:bodyPr>
           <a:p>
-            <a:pPr>
-              <a:lnSpc>
-                <a:spcPct val="100000"/>
-              </a:lnSpc>
-              <a:tabLst>
-                <a:tab pos="0" algn="l"/>
-              </a:tabLst>
-            </a:pPr>
             <a:endParaRPr lang="en-US" sz="1400" b="0" u="none" strike="noStrike">
               <a:solidFill>
                 <a:srgbClr val="000000"/>
@@ -8933,14 +8738,6 @@
             <a:noAutofit/>
           </a:bodyPr>
           <a:p>
-            <a:pPr>
-              <a:lnSpc>
-                <a:spcPct val="100000"/>
-              </a:lnSpc>
-              <a:tabLst>
-                <a:tab pos="0" algn="l"/>
-              </a:tabLst>
-            </a:pPr>
             <a:endParaRPr lang="en-US" sz="1400" b="0" u="none" strike="noStrike">
               <a:solidFill>
                 <a:srgbClr val="000000"/>
@@ -9064,14 +8861,6 @@
             <a:noAutofit/>
           </a:bodyPr>
           <a:p>
-            <a:pPr>
-              <a:lnSpc>
-                <a:spcPct val="100000"/>
-              </a:lnSpc>
-              <a:tabLst>
-                <a:tab pos="0" algn="l"/>
-              </a:tabLst>
-            </a:pPr>
             <a:endParaRPr lang="en-US" sz="1400" b="0" u="none" strike="noStrike">
               <a:solidFill>
                 <a:srgbClr val="000000"/>
@@ -10247,67 +10036,7 @@
                 <a:latin typeface="Roboto"/>
                 <a:ea typeface="Roboto"/>
               </a:rPr>
-              <a:t>Ар</a:t>
-            </a:r>
-            <a:r>
-              <a:rPr lang="en-US" sz="4500" b="1" u="none" strike="noStrike">
-                <a:solidFill>
-                  <a:srgbClr val="FFFFFF"/>
-                </a:solidFill>
-                <a:effectLst/>
-                <a:uFillTx/>
-                <a:latin typeface="Roboto"/>
-                <a:ea typeface="Roboto"/>
-              </a:rPr>
-              <a:t>хи</a:t>
-            </a:r>
-            <a:r>
-              <a:rPr lang="en-US" sz="4500" b="1" u="none" strike="noStrike">
-                <a:solidFill>
-                  <a:srgbClr val="FFFFFF"/>
-                </a:solidFill>
-                <a:effectLst/>
-                <a:uFillTx/>
-                <a:latin typeface="Roboto"/>
-                <a:ea typeface="Roboto"/>
-              </a:rPr>
-              <a:t>те</a:t>
-            </a:r>
-            <a:r>
-              <a:rPr lang="en-US" sz="4500" b="1" u="none" strike="noStrike">
-                <a:solidFill>
-                  <a:srgbClr val="FFFFFF"/>
-                </a:solidFill>
-                <a:effectLst/>
-                <a:uFillTx/>
-                <a:latin typeface="Roboto"/>
-                <a:ea typeface="Roboto"/>
-              </a:rPr>
-              <a:t>кт</a:t>
-            </a:r>
-            <a:r>
-              <a:rPr lang="en-US" sz="4500" b="1" u="none" strike="noStrike">
-                <a:solidFill>
-                  <a:srgbClr val="FFFFFF"/>
-                </a:solidFill>
-                <a:effectLst/>
-                <a:uFillTx/>
-                <a:latin typeface="Roboto"/>
-                <a:ea typeface="Roboto"/>
-              </a:rPr>
-              <a:t>ур</a:t>
-            </a:r>
-            <a:r>
-              <a:rPr lang="en-US" sz="4500" b="1" u="none" strike="noStrike">
-                <a:solidFill>
-                  <a:srgbClr val="FFFFFF"/>
-                </a:solidFill>
-                <a:effectLst/>
-                <a:uFillTx/>
-                <a:latin typeface="Roboto"/>
-                <a:ea typeface="Roboto"/>
-              </a:rPr>
-              <a:t>а</a:t>
+              <a:t>Архитектура</a:t>
             </a:r>
             <a:endParaRPr lang="en-US" sz="4500" b="0" u="none" strike="noStrike">
               <a:solidFill>
@@ -11085,7 +10814,7 @@
       </p:grpSpPr>
       <p:pic>
         <p:nvPicPr>
-          <p:cNvPr id="98" name="Google Shape;302;p29"/>
+          <p:cNvPr id="98" name="Google Shape;295;p 1"/>
           <p:cNvPicPr/>
           <p:nvPr/>
         </p:nvPicPr>
@@ -11095,7 +10824,7 @@
         </p:blipFill>
         <p:spPr>
           <a:xfrm>
-            <a:off x="48240" y="0"/>
+            <a:off x="0" y="0"/>
             <a:ext cx="12191760" cy="6857640"/>
           </a:xfrm>
           <a:prstGeom prst="rect">
@@ -11109,7 +10838,7 @@
       </p:pic>
       <p:sp>
         <p:nvSpPr>
-          <p:cNvPr id="99" name="Google Shape;303;p29"/>
+          <p:cNvPr id="99" name="Google Shape;296;p 1"/>
           <p:cNvSpPr/>
           <p:nvPr/>
         </p:nvSpPr>
@@ -11155,7 +10884,7 @@
                 <a:latin typeface="Roboto"/>
                 <a:ea typeface="Roboto"/>
               </a:rPr>
-              <a:t>Результаты</a:t>
+              <a:t>Архитектура</a:t>
             </a:r>
             <a:endParaRPr lang="en-US" sz="4500" b="0" u="none" strike="noStrike">
               <a:solidFill>
@@ -11170,14 +10899,14 @@
       </p:sp>
       <p:sp>
         <p:nvSpPr>
-          <p:cNvPr id="100" name="Google Shape;297;p 4"/>
+          <p:cNvPr id="100" name="Google Shape;297;p 5"/>
           <p:cNvSpPr/>
           <p:nvPr/>
         </p:nvSpPr>
         <p:spPr>
-          <a:xfrm>
-            <a:off x="180000" y="1265760"/>
-            <a:ext cx="11520000" cy="5131440"/>
+          <a:xfrm rot="7800">
+            <a:off x="713160" y="1271520"/>
+            <a:ext cx="10325880" cy="5389200"/>
           </a:xfrm>
           <a:prstGeom prst="rect">
             <a:avLst/>
@@ -11202,11 +10931,149 @@
               <a:lnSpc>
                 <a:spcPct val="100000"/>
               </a:lnSpc>
+              <a:spcBef>
+                <a:spcPts val="340"/>
+              </a:spcBef>
+              <a:spcAft>
+                <a:spcPts val="142"/>
+              </a:spcAft>
               <a:tabLst>
                 <a:tab pos="0" algn="l"/>
               </a:tabLst>
             </a:pPr>
-            <a:endParaRPr lang="en-US" sz="2400" b="0" u="none" strike="noStrike">
+            <a:r>
+              <a:rPr lang="en-US" sz="1500" b="0" u="none" strike="noStrike">
+                <a:solidFill>
+                  <a:srgbClr val="1D1C1D"/>
+                </a:solidFill>
+                <a:effectLst/>
+                <a:uFillTx/>
+                <a:latin typeface="Roboto"/>
+                <a:ea typeface="Roboto"/>
+              </a:rPr>
+              <a:t>7. Очередь:</a:t>
+            </a:r>
+            <a:r>
+              <a:rPr lang="en-US" sz="1500" b="0" u="none" strike="noStrike">
+                <a:solidFill>
+                  <a:srgbClr val="1D1C1D"/>
+                </a:solidFill>
+                <a:effectLst/>
+                <a:uFillTx/>
+                <a:latin typeface="Roboto"/>
+                <a:ea typeface="Roboto"/>
+              </a:rPr>
+              <a:t>	</a:t>
+            </a:r>
+            <a:r>
+              <a:rPr lang="en-US" sz="1500" b="0" u="none" strike="noStrike">
+                <a:solidFill>
+                  <a:srgbClr val="1D1C1D"/>
+                </a:solidFill>
+                <a:effectLst/>
+                <a:uFillTx/>
+                <a:latin typeface="Roboto"/>
+                <a:ea typeface="Roboto"/>
+              </a:rPr>
+              <a:t>	</a:t>
+            </a:r>
+            <a:r>
+              <a:rPr lang="en-US" sz="1500" b="0" u="none" strike="noStrike">
+                <a:solidFill>
+                  <a:srgbClr val="1D1C1D"/>
+                </a:solidFill>
+                <a:effectLst/>
+                <a:uFillTx/>
+                <a:latin typeface="Roboto"/>
+                <a:ea typeface="Roboto"/>
+              </a:rPr>
+              <a:t>	</a:t>
+            </a:r>
+            <a:r>
+              <a:rPr lang="en-US" sz="1500" b="0" u="none" strike="noStrike">
+                <a:solidFill>
+                  <a:srgbClr val="1D1C1D"/>
+                </a:solidFill>
+                <a:effectLst/>
+                <a:uFillTx/>
+                <a:latin typeface="Roboto"/>
+                <a:ea typeface="Roboto"/>
+              </a:rPr>
+              <a:t>	</a:t>
+            </a:r>
+            <a:r>
+              <a:rPr lang="en-US" sz="1500" b="0" u="none" strike="noStrike">
+                <a:solidFill>
+                  <a:srgbClr val="1D1C1D"/>
+                </a:solidFill>
+                <a:effectLst/>
+                <a:uFillTx/>
+                <a:latin typeface="Roboto"/>
+                <a:ea typeface="Roboto"/>
+              </a:rPr>
+              <a:t>	</a:t>
+            </a:r>
+            <a:r>
+              <a:rPr lang="en-US" sz="1500" b="0" u="none" strike="noStrike">
+                <a:solidFill>
+                  <a:srgbClr val="1D1C1D"/>
+                </a:solidFill>
+                <a:effectLst/>
+                <a:uFillTx/>
+                <a:latin typeface="Roboto"/>
+                <a:ea typeface="Roboto"/>
+              </a:rPr>
+              <a:t>	</a:t>
+            </a:r>
+            <a:r>
+              <a:rPr lang="en-US" sz="1500" b="0" u="none" strike="noStrike">
+                <a:solidFill>
+                  <a:srgbClr val="1D1C1D"/>
+                </a:solidFill>
+                <a:effectLst/>
+                <a:uFillTx/>
+                <a:latin typeface="Roboto"/>
+                <a:ea typeface="Roboto"/>
+              </a:rPr>
+              <a:t>	</a:t>
+            </a:r>
+            <a:r>
+              <a:rPr lang="en-US" sz="1500" b="0" u="none" strike="noStrike">
+                <a:solidFill>
+                  <a:srgbClr val="1D1C1D"/>
+                </a:solidFill>
+                <a:effectLst/>
+                <a:uFillTx/>
+                <a:latin typeface="Roboto"/>
+                <a:ea typeface="Roboto"/>
+              </a:rPr>
+              <a:t>	</a:t>
+            </a:r>
+            <a:r>
+              <a:rPr lang="en-US" sz="1500" b="0" u="none" strike="noStrike">
+                <a:solidFill>
+                  <a:srgbClr val="1D1C1D"/>
+                </a:solidFill>
+                <a:effectLst/>
+                <a:uFillTx/>
+                <a:latin typeface="Roboto"/>
+                <a:ea typeface="Roboto"/>
+              </a:rPr>
+              <a:t>	</a:t>
+            </a:r>
+            <a:r>
+              <a:rPr lang="en-US" sz="1500" b="0" u="none" strike="noStrike">
+                <a:solidFill>
+                  <a:srgbClr val="1D1C1D"/>
+                </a:solidFill>
+                <a:effectLst/>
+                <a:uFillTx/>
+                <a:latin typeface="Roboto"/>
+                <a:ea typeface="Roboto"/>
+              </a:rPr>
+              <a:t>9. Строка таблицы:</a:t>
+            </a:r>
+            <a:endParaRPr lang="en-US" sz="1500" b="0" u="none" strike="noStrike">
               <a:solidFill>
                 <a:srgbClr val="000000"/>
               </a:solidFill>
@@ -11220,23 +11087,137 @@
               <a:lnSpc>
                 <a:spcPct val="100000"/>
               </a:lnSpc>
+              <a:spcBef>
+                <a:spcPts val="340"/>
+              </a:spcBef>
+              <a:spcAft>
+                <a:spcPts val="142"/>
+              </a:spcAft>
               <a:tabLst>
                 <a:tab pos="0" algn="l"/>
               </a:tabLst>
             </a:pPr>
             <a:r>
-              <a:rPr lang="en-US" sz="2800" b="0" u="none" strike="noStrike">
-                <a:solidFill>
-                  <a:srgbClr val="1D1C1D"/>
-                </a:solidFill>
-                <a:effectLst/>
-                <a:uFillTx/>
-                <a:latin typeface="Roboto"/>
-                <a:ea typeface="Roboto"/>
-              </a:rPr>
-              <a:t>1. Многопоточная вставка в postgres из очереди</a:t>
-            </a:r>
-            <a:endParaRPr lang="en-US" sz="2800" b="0" u="none" strike="noStrike">
+              <a:rPr lang="en-US" sz="1500" b="0" u="none" strike="noStrike">
+                <a:solidFill>
+                  <a:srgbClr val="1D1C1D"/>
+                </a:solidFill>
+                <a:effectLst/>
+                <a:uFillTx/>
+                <a:latin typeface="Roboto"/>
+                <a:ea typeface="Roboto"/>
+              </a:rPr>
+              <a:t>	</a:t>
+            </a:r>
+            <a:r>
+              <a:rPr lang="en-US" sz="1500" b="0" u="none" strike="noStrike">
+                <a:solidFill>
+                  <a:srgbClr val="1D1C1D"/>
+                </a:solidFill>
+                <a:effectLst/>
+                <a:uFillTx/>
+                <a:latin typeface="Roboto"/>
+                <a:ea typeface="Roboto"/>
+              </a:rPr>
+              <a:t>typedef struct Node { </a:t>
+            </a:r>
+            <a:r>
+              <a:rPr lang="en-US" sz="1500" b="0" u="none" strike="noStrike">
+                <a:solidFill>
+                  <a:srgbClr val="1D1C1D"/>
+                </a:solidFill>
+                <a:effectLst/>
+                <a:uFillTx/>
+                <a:latin typeface="Roboto"/>
+                <a:ea typeface="Roboto"/>
+              </a:rPr>
+              <a:t>	</a:t>
+            </a:r>
+            <a:r>
+              <a:rPr lang="en-US" sz="1500" b="0" u="none" strike="noStrike">
+                <a:solidFill>
+                  <a:srgbClr val="1D1C1D"/>
+                </a:solidFill>
+                <a:effectLst/>
+                <a:uFillTx/>
+                <a:latin typeface="Roboto"/>
+                <a:ea typeface="Roboto"/>
+              </a:rPr>
+              <a:t>	</a:t>
+            </a:r>
+            <a:r>
+              <a:rPr lang="en-US" sz="1500" b="0" u="none" strike="noStrike">
+                <a:solidFill>
+                  <a:srgbClr val="1D1C1D"/>
+                </a:solidFill>
+                <a:effectLst/>
+                <a:uFillTx/>
+                <a:latin typeface="Roboto"/>
+                <a:ea typeface="Roboto"/>
+              </a:rPr>
+              <a:t>	</a:t>
+            </a:r>
+            <a:r>
+              <a:rPr lang="en-US" sz="1500" b="0" u="none" strike="noStrike">
+                <a:solidFill>
+                  <a:srgbClr val="1D1C1D"/>
+                </a:solidFill>
+                <a:effectLst/>
+                <a:uFillTx/>
+                <a:latin typeface="Roboto"/>
+                <a:ea typeface="Roboto"/>
+              </a:rPr>
+              <a:t>	</a:t>
+            </a:r>
+            <a:r>
+              <a:rPr lang="en-US" sz="1500" b="0" u="none" strike="noStrike">
+                <a:solidFill>
+                  <a:srgbClr val="1D1C1D"/>
+                </a:solidFill>
+                <a:effectLst/>
+                <a:uFillTx/>
+                <a:latin typeface="Roboto"/>
+                <a:ea typeface="Roboto"/>
+              </a:rPr>
+              <a:t>	</a:t>
+            </a:r>
+            <a:r>
+              <a:rPr lang="en-US" sz="1500" b="0" u="none" strike="noStrike">
+                <a:solidFill>
+                  <a:srgbClr val="1D1C1D"/>
+                </a:solidFill>
+                <a:effectLst/>
+                <a:uFillTx/>
+                <a:latin typeface="Roboto"/>
+                <a:ea typeface="Roboto"/>
+              </a:rPr>
+              <a:t>	</a:t>
+            </a:r>
+            <a:r>
+              <a:rPr lang="en-US" sz="1500" b="0" u="none" strike="noStrike">
+                <a:solidFill>
+                  <a:srgbClr val="1D1C1D"/>
+                </a:solidFill>
+                <a:effectLst/>
+                <a:uFillTx/>
+                <a:latin typeface="Roboto"/>
+                <a:ea typeface="Roboto"/>
+              </a:rPr>
+              <a:t>	</a:t>
+            </a:r>
+            <a:r>
+              <a:rPr lang="en-US" sz="1500" b="0" u="none" strike="noStrike">
+                <a:solidFill>
+                  <a:srgbClr val="1D1C1D"/>
+                </a:solidFill>
+                <a:effectLst/>
+                <a:uFillTx/>
+                <a:latin typeface="Roboto"/>
+                <a:ea typeface="Roboto"/>
+              </a:rPr>
+              <a:t>struct SourceRow { </a:t>
+            </a:r>
+            <a:endParaRPr lang="en-US" sz="1500" b="0" u="none" strike="noStrike">
               <a:solidFill>
                 <a:srgbClr val="000000"/>
               </a:solidFill>
@@ -11250,11 +11231,173 @@
               <a:lnSpc>
                 <a:spcPct val="100000"/>
               </a:lnSpc>
+              <a:spcBef>
+                <a:spcPts val="340"/>
+              </a:spcBef>
+              <a:spcAft>
+                <a:spcPts val="142"/>
+              </a:spcAft>
               <a:tabLst>
                 <a:tab pos="0" algn="l"/>
               </a:tabLst>
             </a:pPr>
-            <a:endParaRPr lang="en-US" sz="2800" b="0" u="none" strike="noStrike">
+            <a:r>
+              <a:rPr lang="en-US" sz="1500" b="0" u="none" strike="noStrike">
+                <a:solidFill>
+                  <a:srgbClr val="1D1C1D"/>
+                </a:solidFill>
+                <a:effectLst/>
+                <a:uFillTx/>
+                <a:latin typeface="Roboto"/>
+                <a:ea typeface="Roboto"/>
+              </a:rPr>
+              <a:t>	</a:t>
+            </a:r>
+            <a:r>
+              <a:rPr lang="en-US" sz="1500" b="0" u="none" strike="noStrike">
+                <a:solidFill>
+                  <a:srgbClr val="1D1C1D"/>
+                </a:solidFill>
+                <a:effectLst/>
+                <a:uFillTx/>
+                <a:latin typeface="Roboto"/>
+                <a:ea typeface="Roboto"/>
+              </a:rPr>
+              <a:t>	</a:t>
+            </a:r>
+            <a:r>
+              <a:rPr lang="en-US" sz="1500" b="0" u="none" strike="noStrike">
+                <a:solidFill>
+                  <a:srgbClr val="1D1C1D"/>
+                </a:solidFill>
+                <a:effectLst/>
+                <a:uFillTx/>
+                <a:latin typeface="Roboto"/>
+                <a:ea typeface="Roboto"/>
+              </a:rPr>
+              <a:t>void *data;</a:t>
+            </a:r>
+            <a:r>
+              <a:rPr lang="en-US" sz="1500" b="0" u="none" strike="noStrike">
+                <a:solidFill>
+                  <a:srgbClr val="1D1C1D"/>
+                </a:solidFill>
+                <a:effectLst/>
+                <a:uFillTx/>
+                <a:latin typeface="Roboto"/>
+                <a:ea typeface="Roboto"/>
+              </a:rPr>
+              <a:t>	</a:t>
+            </a:r>
+            <a:r>
+              <a:rPr lang="en-US" sz="1500" b="0" u="none" strike="noStrike">
+                <a:solidFill>
+                  <a:srgbClr val="1D1C1D"/>
+                </a:solidFill>
+                <a:effectLst/>
+                <a:uFillTx/>
+                <a:latin typeface="Roboto"/>
+                <a:ea typeface="Roboto"/>
+              </a:rPr>
+              <a:t>	</a:t>
+            </a:r>
+            <a:r>
+              <a:rPr lang="en-US" sz="1500" b="0" u="none" strike="noStrike">
+                <a:solidFill>
+                  <a:srgbClr val="1D1C1D"/>
+                </a:solidFill>
+                <a:effectLst/>
+                <a:uFillTx/>
+                <a:latin typeface="Roboto"/>
+                <a:ea typeface="Roboto"/>
+              </a:rPr>
+              <a:t>	</a:t>
+            </a:r>
+            <a:r>
+              <a:rPr lang="en-US" sz="1500" b="0" u="none" strike="noStrike">
+                <a:solidFill>
+                  <a:srgbClr val="1D1C1D"/>
+                </a:solidFill>
+                <a:effectLst/>
+                <a:uFillTx/>
+                <a:latin typeface="Roboto"/>
+                <a:ea typeface="Roboto"/>
+              </a:rPr>
+              <a:t>	</a:t>
+            </a:r>
+            <a:r>
+              <a:rPr lang="en-US" sz="1500" b="0" u="none" strike="noStrike">
+                <a:solidFill>
+                  <a:srgbClr val="1D1C1D"/>
+                </a:solidFill>
+                <a:effectLst/>
+                <a:uFillTx/>
+                <a:latin typeface="Roboto"/>
+                <a:ea typeface="Roboto"/>
+              </a:rPr>
+              <a:t>	</a:t>
+            </a:r>
+            <a:r>
+              <a:rPr lang="en-US" sz="1500" b="0" u="none" strike="noStrike">
+                <a:solidFill>
+                  <a:srgbClr val="1D1C1D"/>
+                </a:solidFill>
+                <a:effectLst/>
+                <a:uFillTx/>
+                <a:latin typeface="Roboto"/>
+                <a:ea typeface="Roboto"/>
+              </a:rPr>
+              <a:t>	</a:t>
+            </a:r>
+            <a:r>
+              <a:rPr lang="en-US" sz="1500" b="0" u="none" strike="noStrike">
+                <a:solidFill>
+                  <a:srgbClr val="1D1C1D"/>
+                </a:solidFill>
+                <a:effectLst/>
+                <a:uFillTx/>
+                <a:latin typeface="Roboto"/>
+                <a:ea typeface="Roboto"/>
+              </a:rPr>
+              <a:t>	</a:t>
+            </a:r>
+            <a:r>
+              <a:rPr lang="en-US" sz="1500" b="0" u="none" strike="noStrike">
+                <a:solidFill>
+                  <a:srgbClr val="1D1C1D"/>
+                </a:solidFill>
+                <a:effectLst/>
+                <a:uFillTx/>
+                <a:latin typeface="Roboto"/>
+                <a:ea typeface="Roboto"/>
+              </a:rPr>
+              <a:t>	</a:t>
+            </a:r>
+            <a:r>
+              <a:rPr lang="en-US" sz="1500" b="0" u="none" strike="noStrike">
+                <a:solidFill>
+                  <a:srgbClr val="1D1C1D"/>
+                </a:solidFill>
+                <a:effectLst/>
+                <a:uFillTx/>
+                <a:latin typeface="Roboto"/>
+                <a:ea typeface="Roboto"/>
+              </a:rPr>
+              <a:t>	</a:t>
+            </a:r>
+            <a:r>
+              <a:rPr lang="en-US" sz="1500" b="0" u="none" strike="noStrike">
+                <a:solidFill>
+                  <a:srgbClr val="1D1C1D"/>
+                </a:solidFill>
+                <a:effectLst/>
+                <a:uFillTx/>
+                <a:latin typeface="Roboto"/>
+                <a:ea typeface="Roboto"/>
+              </a:rPr>
+              <a:t>int id;  </a:t>
+            </a:r>
+            <a:endParaRPr lang="en-US" sz="1500" b="0" u="none" strike="noStrike">
               <a:solidFill>
                 <a:srgbClr val="000000"/>
               </a:solidFill>
@@ -11268,23 +11411,161 @@
               <a:lnSpc>
                 <a:spcPct val="100000"/>
               </a:lnSpc>
+              <a:spcBef>
+                <a:spcPts val="340"/>
+              </a:spcBef>
+              <a:spcAft>
+                <a:spcPts val="142"/>
+              </a:spcAft>
               <a:tabLst>
                 <a:tab pos="0" algn="l"/>
               </a:tabLst>
             </a:pPr>
             <a:r>
-              <a:rPr lang="en-US" sz="2800" b="0" u="none" strike="noStrike">
-                <a:solidFill>
-                  <a:srgbClr val="1D1C1D"/>
-                </a:solidFill>
-                <a:effectLst/>
-                <a:uFillTx/>
-                <a:latin typeface="Roboto"/>
-                <a:ea typeface="Roboto"/>
-              </a:rPr>
-              <a:t>2. Выборка пачки из mysql</a:t>
-            </a:r>
-            <a:endParaRPr lang="en-US" sz="2800" b="0" u="none" strike="noStrike">
+              <a:rPr lang="en-US" sz="1500" b="0" u="none" strike="noStrike">
+                <a:solidFill>
+                  <a:srgbClr val="1D1C1D"/>
+                </a:solidFill>
+                <a:effectLst/>
+                <a:uFillTx/>
+                <a:latin typeface="Roboto"/>
+                <a:ea typeface="Roboto"/>
+              </a:rPr>
+              <a:t>	</a:t>
+            </a:r>
+            <a:r>
+              <a:rPr lang="en-US" sz="1500" b="0" u="none" strike="noStrike">
+                <a:solidFill>
+                  <a:srgbClr val="1D1C1D"/>
+                </a:solidFill>
+                <a:effectLst/>
+                <a:uFillTx/>
+                <a:latin typeface="Roboto"/>
+                <a:ea typeface="Roboto"/>
+              </a:rPr>
+              <a:t>	</a:t>
+            </a:r>
+            <a:r>
+              <a:rPr lang="en-US" sz="1500" b="0" u="none" strike="noStrike">
+                <a:solidFill>
+                  <a:srgbClr val="1D1C1D"/>
+                </a:solidFill>
+                <a:effectLst/>
+                <a:uFillTx/>
+                <a:latin typeface="Roboto"/>
+                <a:ea typeface="Roboto"/>
+              </a:rPr>
+              <a:t>struct Node *next;</a:t>
+            </a:r>
+            <a:r>
+              <a:rPr lang="en-US" sz="1500" b="0" u="none" strike="noStrike">
+                <a:solidFill>
+                  <a:srgbClr val="1D1C1D"/>
+                </a:solidFill>
+                <a:effectLst/>
+                <a:uFillTx/>
+                <a:latin typeface="Roboto"/>
+                <a:ea typeface="Roboto"/>
+              </a:rPr>
+              <a:t>	</a:t>
+            </a:r>
+            <a:r>
+              <a:rPr lang="en-US" sz="1500" b="0" u="none" strike="noStrike">
+                <a:solidFill>
+                  <a:srgbClr val="1D1C1D"/>
+                </a:solidFill>
+                <a:effectLst/>
+                <a:uFillTx/>
+                <a:latin typeface="Roboto"/>
+                <a:ea typeface="Roboto"/>
+              </a:rPr>
+              <a:t>	</a:t>
+            </a:r>
+            <a:r>
+              <a:rPr lang="en-US" sz="1500" b="0" u="none" strike="noStrike">
+                <a:solidFill>
+                  <a:srgbClr val="1D1C1D"/>
+                </a:solidFill>
+                <a:effectLst/>
+                <a:uFillTx/>
+                <a:latin typeface="Roboto"/>
+                <a:ea typeface="Roboto"/>
+              </a:rPr>
+              <a:t>	</a:t>
+            </a:r>
+            <a:r>
+              <a:rPr lang="en-US" sz="1500" b="0" u="none" strike="noStrike">
+                <a:solidFill>
+                  <a:srgbClr val="1D1C1D"/>
+                </a:solidFill>
+                <a:effectLst/>
+                <a:uFillTx/>
+                <a:latin typeface="Roboto"/>
+                <a:ea typeface="Roboto"/>
+              </a:rPr>
+              <a:t>	</a:t>
+            </a:r>
+            <a:r>
+              <a:rPr lang="en-US" sz="1500" b="0" u="none" strike="noStrike">
+                <a:solidFill>
+                  <a:srgbClr val="1D1C1D"/>
+                </a:solidFill>
+                <a:effectLst/>
+                <a:uFillTx/>
+                <a:latin typeface="Roboto"/>
+                <a:ea typeface="Roboto"/>
+              </a:rPr>
+              <a:t>	</a:t>
+            </a:r>
+            <a:r>
+              <a:rPr lang="en-US" sz="1500" b="0" u="none" strike="noStrike">
+                <a:solidFill>
+                  <a:srgbClr val="1D1C1D"/>
+                </a:solidFill>
+                <a:effectLst/>
+                <a:uFillTx/>
+                <a:latin typeface="Roboto"/>
+                <a:ea typeface="Roboto"/>
+              </a:rPr>
+              <a:t>	</a:t>
+            </a:r>
+            <a:r>
+              <a:rPr lang="en-US" sz="1500" b="0" u="none" strike="noStrike">
+                <a:solidFill>
+                  <a:srgbClr val="1D1C1D"/>
+                </a:solidFill>
+                <a:effectLst/>
+                <a:uFillTx/>
+                <a:latin typeface="Roboto"/>
+                <a:ea typeface="Roboto"/>
+              </a:rPr>
+              <a:t>	</a:t>
+            </a:r>
+            <a:r>
+              <a:rPr lang="en-US" sz="1500" b="0" u="none" strike="noStrike">
+                <a:solidFill>
+                  <a:srgbClr val="1D1C1D"/>
+                </a:solidFill>
+                <a:effectLst/>
+                <a:uFillTx/>
+                <a:latin typeface="Roboto"/>
+                <a:ea typeface="Roboto"/>
+              </a:rPr>
+              <a:t>	</a:t>
+            </a:r>
+            <a:r>
+              <a:rPr lang="en-US" sz="1500" b="0" u="none" strike="noStrike">
+                <a:solidFill>
+                  <a:srgbClr val="1D1C1D"/>
+                </a:solidFill>
+                <a:effectLst/>
+                <a:uFillTx/>
+                <a:latin typeface="Roboto"/>
+                <a:ea typeface="Roboto"/>
+              </a:rPr>
+              <a:t>char code[CLEN]; </a:t>
+            </a:r>
+            <a:endParaRPr lang="en-US" sz="1500" b="0" u="none" strike="noStrike">
               <a:solidFill>
                 <a:srgbClr val="000000"/>
               </a:solidFill>
@@ -11298,11 +11579,185 @@
               <a:lnSpc>
                 <a:spcPct val="100000"/>
               </a:lnSpc>
+              <a:spcBef>
+                <a:spcPts val="340"/>
+              </a:spcBef>
+              <a:spcAft>
+                <a:spcPts val="142"/>
+              </a:spcAft>
               <a:tabLst>
                 <a:tab pos="0" algn="l"/>
               </a:tabLst>
             </a:pPr>
-            <a:endParaRPr lang="en-US" sz="2800" b="0" u="none" strike="noStrike">
+            <a:r>
+              <a:rPr lang="en-US" sz="1500" b="0" u="none" strike="noStrike">
+                <a:solidFill>
+                  <a:srgbClr val="1D1C1D"/>
+                </a:solidFill>
+                <a:effectLst/>
+                <a:uFillTx/>
+                <a:latin typeface="Roboto"/>
+                <a:ea typeface="Roboto"/>
+              </a:rPr>
+              <a:t>	</a:t>
+            </a:r>
+            <a:r>
+              <a:rPr lang="en-US" sz="1500" b="0" u="none" strike="noStrike">
+                <a:solidFill>
+                  <a:srgbClr val="1D1C1D"/>
+                </a:solidFill>
+                <a:effectLst/>
+                <a:uFillTx/>
+                <a:latin typeface="Roboto"/>
+                <a:ea typeface="Roboto"/>
+              </a:rPr>
+              <a:t>} Node;</a:t>
+            </a:r>
+            <a:r>
+              <a:rPr lang="en-US" sz="1500" b="0" u="none" strike="noStrike">
+                <a:solidFill>
+                  <a:srgbClr val="1D1C1D"/>
+                </a:solidFill>
+                <a:effectLst/>
+                <a:uFillTx/>
+                <a:latin typeface="Roboto"/>
+                <a:ea typeface="Roboto"/>
+              </a:rPr>
+              <a:t>	</a:t>
+            </a:r>
+            <a:r>
+              <a:rPr lang="en-US" sz="1500" b="0" u="none" strike="noStrike">
+                <a:solidFill>
+                  <a:srgbClr val="1D1C1D"/>
+                </a:solidFill>
+                <a:effectLst/>
+                <a:uFillTx/>
+                <a:latin typeface="Roboto"/>
+                <a:ea typeface="Roboto"/>
+              </a:rPr>
+              <a:t>	</a:t>
+            </a:r>
+            <a:r>
+              <a:rPr lang="en-US" sz="1500" b="0" u="none" strike="noStrike">
+                <a:solidFill>
+                  <a:srgbClr val="1D1C1D"/>
+                </a:solidFill>
+                <a:effectLst/>
+                <a:uFillTx/>
+                <a:latin typeface="Roboto"/>
+                <a:ea typeface="Roboto"/>
+              </a:rPr>
+              <a:t>	</a:t>
+            </a:r>
+            <a:r>
+              <a:rPr lang="en-US" sz="1500" b="0" u="none" strike="noStrike">
+                <a:solidFill>
+                  <a:srgbClr val="1D1C1D"/>
+                </a:solidFill>
+                <a:effectLst/>
+                <a:uFillTx/>
+                <a:latin typeface="Roboto"/>
+                <a:ea typeface="Roboto"/>
+              </a:rPr>
+              <a:t>	</a:t>
+            </a:r>
+            <a:r>
+              <a:rPr lang="en-US" sz="1500" b="0" u="none" strike="noStrike">
+                <a:solidFill>
+                  <a:srgbClr val="1D1C1D"/>
+                </a:solidFill>
+                <a:effectLst/>
+                <a:uFillTx/>
+                <a:latin typeface="Roboto"/>
+                <a:ea typeface="Roboto"/>
+              </a:rPr>
+              <a:t>	</a:t>
+            </a:r>
+            <a:r>
+              <a:rPr lang="en-US" sz="1500" b="0" u="none" strike="noStrike">
+                <a:solidFill>
+                  <a:srgbClr val="1D1C1D"/>
+                </a:solidFill>
+                <a:effectLst/>
+                <a:uFillTx/>
+                <a:latin typeface="Roboto"/>
+                <a:ea typeface="Roboto"/>
+              </a:rPr>
+              <a:t>	</a:t>
+            </a:r>
+            <a:r>
+              <a:rPr lang="en-US" sz="1500" b="0" u="none" strike="noStrike">
+                <a:solidFill>
+                  <a:srgbClr val="1D1C1D"/>
+                </a:solidFill>
+                <a:effectLst/>
+                <a:uFillTx/>
+                <a:latin typeface="Roboto"/>
+                <a:ea typeface="Roboto"/>
+              </a:rPr>
+              <a:t>	</a:t>
+            </a:r>
+            <a:r>
+              <a:rPr lang="en-US" sz="1500" b="0" u="none" strike="noStrike">
+                <a:solidFill>
+                  <a:srgbClr val="1D1C1D"/>
+                </a:solidFill>
+                <a:effectLst/>
+                <a:uFillTx/>
+                <a:latin typeface="Roboto"/>
+                <a:ea typeface="Roboto"/>
+              </a:rPr>
+              <a:t>	</a:t>
+            </a:r>
+            <a:r>
+              <a:rPr lang="en-US" sz="1500" b="0" u="none" strike="noStrike">
+                <a:solidFill>
+                  <a:srgbClr val="1D1C1D"/>
+                </a:solidFill>
+                <a:effectLst/>
+                <a:uFillTx/>
+                <a:latin typeface="Roboto"/>
+                <a:ea typeface="Roboto"/>
+              </a:rPr>
+              <a:t>	</a:t>
+            </a:r>
+            <a:r>
+              <a:rPr lang="en-US" sz="1500" b="0" u="none" strike="noStrike">
+                <a:solidFill>
+                  <a:srgbClr val="1D1C1D"/>
+                </a:solidFill>
+                <a:effectLst/>
+                <a:uFillTx/>
+                <a:latin typeface="Roboto"/>
+                <a:ea typeface="Roboto"/>
+              </a:rPr>
+              <a:t>	</a:t>
+            </a:r>
+            <a:r>
+              <a:rPr lang="en-US" sz="1500" b="0" u="none" strike="noStrike">
+                <a:solidFill>
+                  <a:srgbClr val="1D1C1D"/>
+                </a:solidFill>
+                <a:effectLst/>
+                <a:uFillTx/>
+                <a:latin typeface="Roboto"/>
+                <a:ea typeface="Roboto"/>
+              </a:rPr>
+              <a:t>	</a:t>
+            </a:r>
+            <a:r>
+              <a:rPr lang="en-US" sz="1500" b="0" u="none" strike="noStrike">
+                <a:solidFill>
+                  <a:srgbClr val="1D1C1D"/>
+                </a:solidFill>
+                <a:effectLst/>
+                <a:uFillTx/>
+                <a:latin typeface="Roboto"/>
+                <a:ea typeface="Roboto"/>
+              </a:rPr>
+              <a:t>char val[VLEN];</a:t>
+            </a:r>
+            <a:endParaRPr lang="en-US" sz="1500" b="0" u="none" strike="noStrike">
               <a:solidFill>
                 <a:srgbClr val="000000"/>
               </a:solidFill>
@@ -11316,35 +11771,149 @@
               <a:lnSpc>
                 <a:spcPct val="100000"/>
               </a:lnSpc>
+              <a:spcBef>
+                <a:spcPts val="340"/>
+              </a:spcBef>
+              <a:spcAft>
+                <a:spcPts val="142"/>
+              </a:spcAft>
               <a:tabLst>
                 <a:tab pos="0" algn="l"/>
               </a:tabLst>
             </a:pPr>
             <a:r>
-              <a:rPr lang="en-US" sz="2800" b="0" u="none" strike="noStrike">
-                <a:solidFill>
-                  <a:srgbClr val="1D1C1D"/>
-                </a:solidFill>
-                <a:effectLst/>
-                <a:uFillTx/>
-                <a:latin typeface="Roboto"/>
-                <a:ea typeface="Roboto"/>
-              </a:rPr>
-              <a:t>3. </a:t>
-            </a:r>
-            <a:r>
-              <a:rPr lang="en-US" sz="2800" b="0" u="none" strike="noStrike">
-                <a:solidFill>
-                  <a:srgbClr val="1D1C1D"/>
-                </a:solidFill>
-                <a:effectLst/>
-                <a:uFillTx/>
-                <a:latin typeface="Roboto"/>
-                <a:ea typeface="Roboto"/>
-              </a:rPr>
-              <a:t>https://github.com/gyngazov/otus-c-2026-01/tree/project/HW</a:t>
-            </a:r>
-            <a:endParaRPr lang="en-US" sz="2800" b="0" u="none" strike="noStrike">
+              <a:rPr lang="en-US" sz="1500" b="0" u="none" strike="noStrike">
+                <a:solidFill>
+                  <a:srgbClr val="1D1C1D"/>
+                </a:solidFill>
+                <a:effectLst/>
+                <a:uFillTx/>
+                <a:latin typeface="Roboto"/>
+                <a:ea typeface="Roboto"/>
+              </a:rPr>
+              <a:t>	</a:t>
+            </a:r>
+            <a:r>
+              <a:rPr lang="en-US" sz="1500" b="0" u="none" strike="noStrike">
+                <a:solidFill>
+                  <a:srgbClr val="1D1C1D"/>
+                </a:solidFill>
+                <a:effectLst/>
+                <a:uFillTx/>
+                <a:latin typeface="Roboto"/>
+                <a:ea typeface="Roboto"/>
+              </a:rPr>
+              <a:t>typedef struct { </a:t>
+            </a:r>
+            <a:r>
+              <a:rPr lang="en-US" sz="1500" b="0" u="none" strike="noStrike">
+                <a:solidFill>
+                  <a:srgbClr val="1D1C1D"/>
+                </a:solidFill>
+                <a:effectLst/>
+                <a:uFillTx/>
+                <a:latin typeface="Roboto"/>
+                <a:ea typeface="Roboto"/>
+              </a:rPr>
+              <a:t>	</a:t>
+            </a:r>
+            <a:r>
+              <a:rPr lang="en-US" sz="1500" b="0" u="none" strike="noStrike">
+                <a:solidFill>
+                  <a:srgbClr val="1D1C1D"/>
+                </a:solidFill>
+                <a:effectLst/>
+                <a:uFillTx/>
+                <a:latin typeface="Roboto"/>
+                <a:ea typeface="Roboto"/>
+              </a:rPr>
+              <a:t>	</a:t>
+            </a:r>
+            <a:r>
+              <a:rPr lang="en-US" sz="1500" b="0" u="none" strike="noStrike">
+                <a:solidFill>
+                  <a:srgbClr val="1D1C1D"/>
+                </a:solidFill>
+                <a:effectLst/>
+                <a:uFillTx/>
+                <a:latin typeface="Roboto"/>
+                <a:ea typeface="Roboto"/>
+              </a:rPr>
+              <a:t>	</a:t>
+            </a:r>
+            <a:r>
+              <a:rPr lang="en-US" sz="1500" b="0" u="none" strike="noStrike">
+                <a:solidFill>
+                  <a:srgbClr val="1D1C1D"/>
+                </a:solidFill>
+                <a:effectLst/>
+                <a:uFillTx/>
+                <a:latin typeface="Roboto"/>
+                <a:ea typeface="Roboto"/>
+              </a:rPr>
+              <a:t>	</a:t>
+            </a:r>
+            <a:r>
+              <a:rPr lang="en-US" sz="1500" b="0" u="none" strike="noStrike">
+                <a:solidFill>
+                  <a:srgbClr val="1D1C1D"/>
+                </a:solidFill>
+                <a:effectLst/>
+                <a:uFillTx/>
+                <a:latin typeface="Roboto"/>
+                <a:ea typeface="Roboto"/>
+              </a:rPr>
+              <a:t>	</a:t>
+            </a:r>
+            <a:r>
+              <a:rPr lang="en-US" sz="1500" b="0" u="none" strike="noStrike">
+                <a:solidFill>
+                  <a:srgbClr val="1D1C1D"/>
+                </a:solidFill>
+                <a:effectLst/>
+                <a:uFillTx/>
+                <a:latin typeface="Roboto"/>
+                <a:ea typeface="Roboto"/>
+              </a:rPr>
+              <a:t>	</a:t>
+            </a:r>
+            <a:r>
+              <a:rPr lang="en-US" sz="1500" b="0" u="none" strike="noStrike">
+                <a:solidFill>
+                  <a:srgbClr val="1D1C1D"/>
+                </a:solidFill>
+                <a:effectLst/>
+                <a:uFillTx/>
+                <a:latin typeface="Roboto"/>
+                <a:ea typeface="Roboto"/>
+              </a:rPr>
+              <a:t>	</a:t>
+            </a:r>
+            <a:r>
+              <a:rPr lang="en-US" sz="1500" b="0" u="none" strike="noStrike">
+                <a:solidFill>
+                  <a:srgbClr val="1D1C1D"/>
+                </a:solidFill>
+                <a:effectLst/>
+                <a:uFillTx/>
+                <a:latin typeface="Roboto"/>
+                <a:ea typeface="Roboto"/>
+              </a:rPr>
+              <a:t>	</a:t>
+            </a:r>
+            <a:r>
+              <a:rPr lang="en-US" sz="1500" b="0" u="none" strike="noStrike">
+                <a:solidFill>
+                  <a:srgbClr val="1D1C1D"/>
+                </a:solidFill>
+                <a:effectLst/>
+                <a:uFillTx/>
+                <a:latin typeface="Roboto"/>
+                <a:ea typeface="Roboto"/>
+              </a:rPr>
+              <a:t>};</a:t>
+            </a:r>
+            <a:endParaRPr lang="en-US" sz="1500" b="0" u="none" strike="noStrike">
               <a:solidFill>
                 <a:srgbClr val="000000"/>
               </a:solidFill>
@@ -11358,23 +11927,1217 @@
               <a:lnSpc>
                 <a:spcPct val="100000"/>
               </a:lnSpc>
+              <a:spcBef>
+                <a:spcPts val="340"/>
+              </a:spcBef>
+              <a:spcAft>
+                <a:spcPts val="142"/>
+              </a:spcAft>
               <a:tabLst>
                 <a:tab pos="0" algn="l"/>
               </a:tabLst>
             </a:pPr>
             <a:r>
-              <a:rPr lang="en-US" sz="1700" b="0" u="none" strike="noStrike">
-                <a:solidFill>
-                  <a:srgbClr val="1D1C1D"/>
-                </a:solidFill>
-                <a:effectLst/>
-                <a:uFillTx/>
-                <a:latin typeface="Roboto"/>
-                <a:ea typeface="Roboto"/>
-              </a:rPr>
-              <a:t> </a:t>
-            </a:r>
-            <a:endParaRPr lang="en-US" sz="1700" b="0" u="none" strike="noStrike">
+              <a:rPr lang="en-US" sz="1500" b="0" u="none" strike="noStrike">
+                <a:solidFill>
+                  <a:srgbClr val="1D1C1D"/>
+                </a:solidFill>
+                <a:effectLst/>
+                <a:uFillTx/>
+                <a:latin typeface="Roboto"/>
+                <a:ea typeface="Roboto"/>
+              </a:rPr>
+              <a:t>	</a:t>
+            </a:r>
+            <a:r>
+              <a:rPr lang="en-US" sz="1500" b="0" u="none" strike="noStrike">
+                <a:solidFill>
+                  <a:srgbClr val="1D1C1D"/>
+                </a:solidFill>
+                <a:effectLst/>
+                <a:uFillTx/>
+                <a:latin typeface="Roboto"/>
+                <a:ea typeface="Roboto"/>
+              </a:rPr>
+              <a:t>	</a:t>
+            </a:r>
+            <a:r>
+              <a:rPr lang="en-US" sz="1500" b="0" u="none" strike="noStrike">
+                <a:solidFill>
+                  <a:srgbClr val="1D1C1D"/>
+                </a:solidFill>
+                <a:effectLst/>
+                <a:uFillTx/>
+                <a:latin typeface="Roboto"/>
+                <a:ea typeface="Roboto"/>
+              </a:rPr>
+              <a:t>Node *head; </a:t>
+            </a:r>
+            <a:endParaRPr lang="en-US" sz="1500" b="0" u="none" strike="noStrike">
+              <a:solidFill>
+                <a:srgbClr val="000000"/>
+              </a:solidFill>
+              <a:effectLst/>
+              <a:uFillTx/>
+              <a:latin typeface="Arial"/>
+            </a:endParaRPr>
+          </a:p>
+          <a:p>
+            <a:pPr>
+              <a:lnSpc>
+                <a:spcPct val="100000"/>
+              </a:lnSpc>
+              <a:spcBef>
+                <a:spcPts val="340"/>
+              </a:spcBef>
+              <a:spcAft>
+                <a:spcPts val="142"/>
+              </a:spcAft>
+              <a:tabLst>
+                <a:tab pos="0" algn="l"/>
+              </a:tabLst>
+            </a:pPr>
+            <a:r>
+              <a:rPr lang="en-US" sz="1500" b="0" u="none" strike="noStrike">
+                <a:solidFill>
+                  <a:srgbClr val="1D1C1D"/>
+                </a:solidFill>
+                <a:effectLst/>
+                <a:uFillTx/>
+                <a:latin typeface="Roboto"/>
+                <a:ea typeface="Roboto"/>
+              </a:rPr>
+              <a:t>	</a:t>
+            </a:r>
+            <a:r>
+              <a:rPr lang="en-US" sz="1500" b="0" u="none" strike="noStrike">
+                <a:solidFill>
+                  <a:srgbClr val="1D1C1D"/>
+                </a:solidFill>
+                <a:effectLst/>
+                <a:uFillTx/>
+                <a:latin typeface="Roboto"/>
+                <a:ea typeface="Roboto"/>
+              </a:rPr>
+              <a:t>	</a:t>
+            </a:r>
+            <a:r>
+              <a:rPr lang="en-US" sz="1500" b="0" u="none" strike="noStrike">
+                <a:solidFill>
+                  <a:srgbClr val="1D1C1D"/>
+                </a:solidFill>
+                <a:effectLst/>
+                <a:uFillTx/>
+                <a:latin typeface="Roboto"/>
+                <a:ea typeface="Roboto"/>
+              </a:rPr>
+              <a:t>Node *tail; </a:t>
+            </a:r>
+            <a:r>
+              <a:rPr lang="en-US" sz="1500" b="0" u="none" strike="noStrike">
+                <a:solidFill>
+                  <a:srgbClr val="1D1C1D"/>
+                </a:solidFill>
+                <a:effectLst/>
+                <a:uFillTx/>
+                <a:latin typeface="Roboto"/>
+                <a:ea typeface="Roboto"/>
+              </a:rPr>
+              <a:t>	</a:t>
+            </a:r>
+            <a:r>
+              <a:rPr lang="en-US" sz="1500" b="0" u="none" strike="noStrike">
+                <a:solidFill>
+                  <a:srgbClr val="1D1C1D"/>
+                </a:solidFill>
+                <a:effectLst/>
+                <a:uFillTx/>
+                <a:latin typeface="Roboto"/>
+                <a:ea typeface="Roboto"/>
+              </a:rPr>
+              <a:t>	</a:t>
+            </a:r>
+            <a:r>
+              <a:rPr lang="en-US" sz="1500" b="0" u="none" strike="noStrike">
+                <a:solidFill>
+                  <a:srgbClr val="1D1C1D"/>
+                </a:solidFill>
+                <a:effectLst/>
+                <a:uFillTx/>
+                <a:latin typeface="Roboto"/>
+                <a:ea typeface="Roboto"/>
+              </a:rPr>
+              <a:t>	</a:t>
+            </a:r>
+            <a:r>
+              <a:rPr lang="en-US" sz="1500" b="0" u="none" strike="noStrike">
+                <a:solidFill>
+                  <a:srgbClr val="1D1C1D"/>
+                </a:solidFill>
+                <a:effectLst/>
+                <a:uFillTx/>
+                <a:latin typeface="Roboto"/>
+                <a:ea typeface="Roboto"/>
+              </a:rPr>
+              <a:t>	</a:t>
+            </a:r>
+            <a:r>
+              <a:rPr lang="en-US" sz="1500" b="0" u="none" strike="noStrike">
+                <a:solidFill>
+                  <a:srgbClr val="1D1C1D"/>
+                </a:solidFill>
+                <a:effectLst/>
+                <a:uFillTx/>
+                <a:latin typeface="Roboto"/>
+                <a:ea typeface="Roboto"/>
+              </a:rPr>
+              <a:t>	</a:t>
+            </a:r>
+            <a:r>
+              <a:rPr lang="en-US" sz="1500" b="0" u="none" strike="noStrike">
+                <a:solidFill>
+                  <a:srgbClr val="1D1C1D"/>
+                </a:solidFill>
+                <a:effectLst/>
+                <a:uFillTx/>
+                <a:latin typeface="Roboto"/>
+                <a:ea typeface="Roboto"/>
+              </a:rPr>
+              <a:t>	</a:t>
+            </a:r>
+            <a:r>
+              <a:rPr lang="en-US" sz="1500" b="0" u="none" strike="noStrike">
+                <a:solidFill>
+                  <a:srgbClr val="1D1C1D"/>
+                </a:solidFill>
+                <a:effectLst/>
+                <a:uFillTx/>
+                <a:latin typeface="Roboto"/>
+                <a:ea typeface="Roboto"/>
+              </a:rPr>
+              <a:t>	</a:t>
+            </a:r>
+            <a:r>
+              <a:rPr lang="en-US" sz="1500" b="0" u="none" strike="noStrike">
+                <a:solidFill>
+                  <a:srgbClr val="1D1C1D"/>
+                </a:solidFill>
+                <a:effectLst/>
+                <a:uFillTx/>
+                <a:latin typeface="Roboto"/>
+                <a:ea typeface="Roboto"/>
+              </a:rPr>
+              <a:t>10. Пачка очереди:</a:t>
+            </a:r>
+            <a:endParaRPr lang="en-US" sz="1500" b="0" u="none" strike="noStrike">
+              <a:solidFill>
+                <a:srgbClr val="000000"/>
+              </a:solidFill>
+              <a:effectLst/>
+              <a:uFillTx/>
+              <a:latin typeface="Arial"/>
+            </a:endParaRPr>
+          </a:p>
+          <a:p>
+            <a:pPr>
+              <a:lnSpc>
+                <a:spcPct val="100000"/>
+              </a:lnSpc>
+              <a:spcBef>
+                <a:spcPts val="340"/>
+              </a:spcBef>
+              <a:spcAft>
+                <a:spcPts val="142"/>
+              </a:spcAft>
+              <a:tabLst>
+                <a:tab pos="0" algn="l"/>
+              </a:tabLst>
+            </a:pPr>
+            <a:r>
+              <a:rPr lang="en-US" sz="1500" b="0" u="none" strike="noStrike">
+                <a:solidFill>
+                  <a:srgbClr val="1D1C1D"/>
+                </a:solidFill>
+                <a:effectLst/>
+                <a:uFillTx/>
+                <a:latin typeface="Roboto"/>
+                <a:ea typeface="Roboto"/>
+              </a:rPr>
+              <a:t>	</a:t>
+            </a:r>
+            <a:r>
+              <a:rPr lang="en-US" sz="1500" b="0" u="none" strike="noStrike">
+                <a:solidFill>
+                  <a:srgbClr val="1D1C1D"/>
+                </a:solidFill>
+                <a:effectLst/>
+                <a:uFillTx/>
+                <a:latin typeface="Roboto"/>
+                <a:ea typeface="Roboto"/>
+              </a:rPr>
+              <a:t>	</a:t>
+            </a:r>
+            <a:r>
+              <a:rPr lang="en-US" sz="1500" b="0" u="none" strike="noStrike">
+                <a:solidFill>
+                  <a:srgbClr val="1D1C1D"/>
+                </a:solidFill>
+                <a:effectLst/>
+                <a:uFillTx/>
+                <a:latin typeface="Roboto"/>
+                <a:ea typeface="Roboto"/>
+              </a:rPr>
+              <a:t>pthread_mutex_t mutex; </a:t>
+            </a:r>
+            <a:r>
+              <a:rPr lang="en-US" sz="1500" b="0" u="none" strike="noStrike">
+                <a:solidFill>
+                  <a:srgbClr val="1D1C1D"/>
+                </a:solidFill>
+                <a:effectLst/>
+                <a:uFillTx/>
+                <a:latin typeface="Roboto"/>
+                <a:ea typeface="Roboto"/>
+              </a:rPr>
+              <a:t>	</a:t>
+            </a:r>
+            <a:r>
+              <a:rPr lang="en-US" sz="1500" b="0" u="none" strike="noStrike">
+                <a:solidFill>
+                  <a:srgbClr val="1D1C1D"/>
+                </a:solidFill>
+                <a:effectLst/>
+                <a:uFillTx/>
+                <a:latin typeface="Roboto"/>
+                <a:ea typeface="Roboto"/>
+              </a:rPr>
+              <a:t>	</a:t>
+            </a:r>
+            <a:r>
+              <a:rPr lang="en-US" sz="1500" b="0" u="none" strike="noStrike">
+                <a:solidFill>
+                  <a:srgbClr val="1D1C1D"/>
+                </a:solidFill>
+                <a:effectLst/>
+                <a:uFillTx/>
+                <a:latin typeface="Roboto"/>
+                <a:ea typeface="Roboto"/>
+              </a:rPr>
+              <a:t>	</a:t>
+            </a:r>
+            <a:r>
+              <a:rPr lang="en-US" sz="1500" b="0" u="none" strike="noStrike">
+                <a:solidFill>
+                  <a:srgbClr val="1D1C1D"/>
+                </a:solidFill>
+                <a:effectLst/>
+                <a:uFillTx/>
+                <a:latin typeface="Roboto"/>
+                <a:ea typeface="Roboto"/>
+              </a:rPr>
+              <a:t>	</a:t>
+            </a:r>
+            <a:r>
+              <a:rPr lang="en-US" sz="1500" b="0" u="none" strike="noStrike">
+                <a:solidFill>
+                  <a:srgbClr val="1D1C1D"/>
+                </a:solidFill>
+                <a:effectLst/>
+                <a:uFillTx/>
+                <a:latin typeface="Roboto"/>
+                <a:ea typeface="Roboto"/>
+              </a:rPr>
+              <a:t>	</a:t>
+            </a:r>
+            <a:r>
+              <a:rPr lang="en-US" sz="1500" b="0" u="none" strike="noStrike">
+                <a:solidFill>
+                  <a:srgbClr val="1D1C1D"/>
+                </a:solidFill>
+                <a:effectLst/>
+                <a:uFillTx/>
+                <a:latin typeface="Roboto"/>
+                <a:ea typeface="Roboto"/>
+              </a:rPr>
+              <a:t>	</a:t>
+            </a:r>
+            <a:r>
+              <a:rPr lang="en-US" sz="1500" b="0" u="none" strike="noStrike">
+                <a:solidFill>
+                  <a:srgbClr val="1D1C1D"/>
+                </a:solidFill>
+                <a:effectLst/>
+                <a:uFillTx/>
+                <a:latin typeface="Roboto"/>
+                <a:ea typeface="Roboto"/>
+              </a:rPr>
+              <a:t>struct Batch {</a:t>
+            </a:r>
+            <a:endParaRPr lang="en-US" sz="1500" b="0" u="none" strike="noStrike">
+              <a:solidFill>
+                <a:srgbClr val="000000"/>
+              </a:solidFill>
+              <a:effectLst/>
+              <a:uFillTx/>
+              <a:latin typeface="Arial"/>
+            </a:endParaRPr>
+          </a:p>
+          <a:p>
+            <a:pPr>
+              <a:lnSpc>
+                <a:spcPct val="100000"/>
+              </a:lnSpc>
+              <a:spcBef>
+                <a:spcPts val="340"/>
+              </a:spcBef>
+              <a:spcAft>
+                <a:spcPts val="142"/>
+              </a:spcAft>
+              <a:tabLst>
+                <a:tab pos="0" algn="l"/>
+              </a:tabLst>
+            </a:pPr>
+            <a:r>
+              <a:rPr lang="en-US" sz="1500" b="0" u="none" strike="noStrike">
+                <a:solidFill>
+                  <a:srgbClr val="1D1C1D"/>
+                </a:solidFill>
+                <a:effectLst/>
+                <a:uFillTx/>
+                <a:latin typeface="Roboto"/>
+                <a:ea typeface="Roboto"/>
+              </a:rPr>
+              <a:t>	</a:t>
+            </a:r>
+            <a:r>
+              <a:rPr lang="en-US" sz="1500" b="0" u="none" strike="noStrike">
+                <a:solidFill>
+                  <a:srgbClr val="1D1C1D"/>
+                </a:solidFill>
+                <a:effectLst/>
+                <a:uFillTx/>
+                <a:latin typeface="Roboto"/>
+                <a:ea typeface="Roboto"/>
+              </a:rPr>
+              <a:t>	</a:t>
+            </a:r>
+            <a:r>
+              <a:rPr lang="en-US" sz="1500" b="0" u="none" strike="noStrike">
+                <a:solidFill>
+                  <a:srgbClr val="1D1C1D"/>
+                </a:solidFill>
+                <a:effectLst/>
+                <a:uFillTx/>
+                <a:latin typeface="Roboto"/>
+                <a:ea typeface="Roboto"/>
+              </a:rPr>
+              <a:t>pthread_cond_t cond; </a:t>
+            </a:r>
+            <a:r>
+              <a:rPr lang="en-US" sz="1500" b="0" u="none" strike="noStrike">
+                <a:solidFill>
+                  <a:srgbClr val="1D1C1D"/>
+                </a:solidFill>
+                <a:effectLst/>
+                <a:uFillTx/>
+                <a:latin typeface="Roboto"/>
+                <a:ea typeface="Roboto"/>
+              </a:rPr>
+              <a:t>	</a:t>
+            </a:r>
+            <a:r>
+              <a:rPr lang="en-US" sz="1500" b="0" u="none" strike="noStrike">
+                <a:solidFill>
+                  <a:srgbClr val="1D1C1D"/>
+                </a:solidFill>
+                <a:effectLst/>
+                <a:uFillTx/>
+                <a:latin typeface="Roboto"/>
+                <a:ea typeface="Roboto"/>
+              </a:rPr>
+              <a:t>	</a:t>
+            </a:r>
+            <a:r>
+              <a:rPr lang="en-US" sz="1500" b="0" u="none" strike="noStrike">
+                <a:solidFill>
+                  <a:srgbClr val="1D1C1D"/>
+                </a:solidFill>
+                <a:effectLst/>
+                <a:uFillTx/>
+                <a:latin typeface="Roboto"/>
+                <a:ea typeface="Roboto"/>
+              </a:rPr>
+              <a:t>	</a:t>
+            </a:r>
+            <a:r>
+              <a:rPr lang="en-US" sz="1500" b="0" u="none" strike="noStrike">
+                <a:solidFill>
+                  <a:srgbClr val="1D1C1D"/>
+                </a:solidFill>
+                <a:effectLst/>
+                <a:uFillTx/>
+                <a:latin typeface="Roboto"/>
+                <a:ea typeface="Roboto"/>
+              </a:rPr>
+              <a:t>	</a:t>
+            </a:r>
+            <a:r>
+              <a:rPr lang="en-US" sz="1500" b="0" u="none" strike="noStrike">
+                <a:solidFill>
+                  <a:srgbClr val="1D1C1D"/>
+                </a:solidFill>
+                <a:effectLst/>
+                <a:uFillTx/>
+                <a:latin typeface="Roboto"/>
+                <a:ea typeface="Roboto"/>
+              </a:rPr>
+              <a:t>	</a:t>
+            </a:r>
+            <a:r>
+              <a:rPr lang="en-US" sz="1500" b="0" u="none" strike="noStrike">
+                <a:solidFill>
+                  <a:srgbClr val="1D1C1D"/>
+                </a:solidFill>
+                <a:effectLst/>
+                <a:uFillTx/>
+                <a:latin typeface="Roboto"/>
+                <a:ea typeface="Roboto"/>
+              </a:rPr>
+              <a:t>	</a:t>
+            </a:r>
+            <a:r>
+              <a:rPr lang="en-US" sz="1500" b="0" u="none" strike="noStrike">
+                <a:solidFill>
+                  <a:srgbClr val="1D1C1D"/>
+                </a:solidFill>
+                <a:effectLst/>
+                <a:uFillTx/>
+                <a:latin typeface="Roboto"/>
+                <a:ea typeface="Roboto"/>
+              </a:rPr>
+              <a:t>	</a:t>
+            </a:r>
+            <a:r>
+              <a:rPr lang="en-US" sz="1500" b="0" u="none" strike="noStrike">
+                <a:solidFill>
+                  <a:srgbClr val="1D1C1D"/>
+                </a:solidFill>
+                <a:effectLst/>
+                <a:uFillTx/>
+                <a:latin typeface="Roboto"/>
+                <a:ea typeface="Roboto"/>
+              </a:rPr>
+              <a:t>int size;</a:t>
+            </a:r>
+            <a:endParaRPr lang="en-US" sz="1500" b="0" u="none" strike="noStrike">
+              <a:solidFill>
+                <a:srgbClr val="000000"/>
+              </a:solidFill>
+              <a:effectLst/>
+              <a:uFillTx/>
+              <a:latin typeface="Arial"/>
+            </a:endParaRPr>
+          </a:p>
+          <a:p>
+            <a:pPr>
+              <a:lnSpc>
+                <a:spcPct val="100000"/>
+              </a:lnSpc>
+              <a:spcBef>
+                <a:spcPts val="340"/>
+              </a:spcBef>
+              <a:spcAft>
+                <a:spcPts val="142"/>
+              </a:spcAft>
+              <a:tabLst>
+                <a:tab pos="0" algn="l"/>
+              </a:tabLst>
+            </a:pPr>
+            <a:r>
+              <a:rPr lang="en-US" sz="1500" b="0" u="none" strike="noStrike">
+                <a:solidFill>
+                  <a:srgbClr val="1D1C1D"/>
+                </a:solidFill>
+                <a:effectLst/>
+                <a:uFillTx/>
+                <a:latin typeface="Roboto"/>
+                <a:ea typeface="Roboto"/>
+              </a:rPr>
+              <a:t>	</a:t>
+            </a:r>
+            <a:r>
+              <a:rPr lang="en-US" sz="1500" b="0" u="none" strike="noStrike">
+                <a:solidFill>
+                  <a:srgbClr val="1D1C1D"/>
+                </a:solidFill>
+                <a:effectLst/>
+                <a:uFillTx/>
+                <a:latin typeface="Roboto"/>
+                <a:ea typeface="Roboto"/>
+              </a:rPr>
+              <a:t>	</a:t>
+            </a:r>
+            <a:r>
+              <a:rPr lang="en-US" sz="1500" b="0" u="none" strike="noStrike">
+                <a:solidFill>
+                  <a:srgbClr val="1D1C1D"/>
+                </a:solidFill>
+                <a:effectLst/>
+                <a:uFillTx/>
+                <a:latin typeface="Roboto"/>
+                <a:ea typeface="Roboto"/>
+              </a:rPr>
+              <a:t>int shutdown; </a:t>
+            </a:r>
+            <a:r>
+              <a:rPr lang="en-US" sz="1500" b="0" u="none" strike="noStrike">
+                <a:solidFill>
+                  <a:srgbClr val="1D1C1D"/>
+                </a:solidFill>
+                <a:effectLst/>
+                <a:uFillTx/>
+                <a:latin typeface="Roboto"/>
+                <a:ea typeface="Roboto"/>
+              </a:rPr>
+              <a:t>	</a:t>
+            </a:r>
+            <a:r>
+              <a:rPr lang="en-US" sz="1500" b="0" u="none" strike="noStrike">
+                <a:solidFill>
+                  <a:srgbClr val="1D1C1D"/>
+                </a:solidFill>
+                <a:effectLst/>
+                <a:uFillTx/>
+                <a:latin typeface="Roboto"/>
+                <a:ea typeface="Roboto"/>
+              </a:rPr>
+              <a:t>	</a:t>
+            </a:r>
+            <a:r>
+              <a:rPr lang="en-US" sz="1500" b="0" u="none" strike="noStrike">
+                <a:solidFill>
+                  <a:srgbClr val="1D1C1D"/>
+                </a:solidFill>
+                <a:effectLst/>
+                <a:uFillTx/>
+                <a:latin typeface="Roboto"/>
+                <a:ea typeface="Roboto"/>
+              </a:rPr>
+              <a:t>	</a:t>
+            </a:r>
+            <a:r>
+              <a:rPr lang="en-US" sz="1500" b="0" u="none" strike="noStrike">
+                <a:solidFill>
+                  <a:srgbClr val="1D1C1D"/>
+                </a:solidFill>
+                <a:effectLst/>
+                <a:uFillTx/>
+                <a:latin typeface="Roboto"/>
+                <a:ea typeface="Roboto"/>
+              </a:rPr>
+              <a:t>	</a:t>
+            </a:r>
+            <a:r>
+              <a:rPr lang="en-US" sz="1500" b="0" u="none" strike="noStrike">
+                <a:solidFill>
+                  <a:srgbClr val="1D1C1D"/>
+                </a:solidFill>
+                <a:effectLst/>
+                <a:uFillTx/>
+                <a:latin typeface="Roboto"/>
+                <a:ea typeface="Roboto"/>
+              </a:rPr>
+              <a:t>	</a:t>
+            </a:r>
+            <a:r>
+              <a:rPr lang="en-US" sz="1500" b="0" u="none" strike="noStrike">
+                <a:solidFill>
+                  <a:srgbClr val="1D1C1D"/>
+                </a:solidFill>
+                <a:effectLst/>
+                <a:uFillTx/>
+                <a:latin typeface="Roboto"/>
+                <a:ea typeface="Roboto"/>
+              </a:rPr>
+              <a:t>	</a:t>
+            </a:r>
+            <a:r>
+              <a:rPr lang="en-US" sz="1500" b="0" u="none" strike="noStrike">
+                <a:solidFill>
+                  <a:srgbClr val="1D1C1D"/>
+                </a:solidFill>
+                <a:effectLst/>
+                <a:uFillTx/>
+                <a:latin typeface="Roboto"/>
+                <a:ea typeface="Roboto"/>
+              </a:rPr>
+              <a:t>	</a:t>
+            </a:r>
+            <a:r>
+              <a:rPr lang="en-US" sz="1500" b="0" u="none" strike="noStrike">
+                <a:solidFill>
+                  <a:srgbClr val="1D1C1D"/>
+                </a:solidFill>
+                <a:effectLst/>
+                <a:uFillTx/>
+                <a:latin typeface="Roboto"/>
+                <a:ea typeface="Roboto"/>
+              </a:rPr>
+              <a:t>	</a:t>
+            </a:r>
+            <a:r>
+              <a:rPr lang="en-US" sz="1500" b="0" u="none" strike="noStrike">
+                <a:solidFill>
+                  <a:srgbClr val="1D1C1D"/>
+                </a:solidFill>
+                <a:effectLst/>
+                <a:uFillTx/>
+                <a:latin typeface="Roboto"/>
+                <a:ea typeface="Roboto"/>
+              </a:rPr>
+              <a:t>	</a:t>
+            </a:r>
+            <a:r>
+              <a:rPr lang="en-US" sz="1500" b="0" u="none" strike="noStrike">
+                <a:solidFill>
+                  <a:srgbClr val="1D1C1D"/>
+                </a:solidFill>
+                <a:effectLst/>
+                <a:uFillTx/>
+                <a:latin typeface="Roboto"/>
+                <a:ea typeface="Roboto"/>
+              </a:rPr>
+              <a:t>struct SourceRow rows[MAX_BATCH];</a:t>
+            </a:r>
+            <a:endParaRPr lang="en-US" sz="1500" b="0" u="none" strike="noStrike">
+              <a:solidFill>
+                <a:srgbClr val="000000"/>
+              </a:solidFill>
+              <a:effectLst/>
+              <a:uFillTx/>
+              <a:latin typeface="Arial"/>
+            </a:endParaRPr>
+          </a:p>
+          <a:p>
+            <a:pPr>
+              <a:lnSpc>
+                <a:spcPct val="100000"/>
+              </a:lnSpc>
+              <a:spcBef>
+                <a:spcPts val="340"/>
+              </a:spcBef>
+              <a:spcAft>
+                <a:spcPts val="142"/>
+              </a:spcAft>
+              <a:tabLst>
+                <a:tab pos="0" algn="l"/>
+              </a:tabLst>
+            </a:pPr>
+            <a:r>
+              <a:rPr lang="en-US" sz="1500" b="0" u="none" strike="noStrike">
+                <a:solidFill>
+                  <a:srgbClr val="1D1C1D"/>
+                </a:solidFill>
+                <a:effectLst/>
+                <a:uFillTx/>
+                <a:latin typeface="Roboto"/>
+                <a:ea typeface="Roboto"/>
+              </a:rPr>
+              <a:t>	</a:t>
+            </a:r>
+            <a:r>
+              <a:rPr lang="en-US" sz="1500" b="0" u="none" strike="noStrike">
+                <a:solidFill>
+                  <a:srgbClr val="1D1C1D"/>
+                </a:solidFill>
+                <a:effectLst/>
+                <a:uFillTx/>
+                <a:latin typeface="Roboto"/>
+                <a:ea typeface="Roboto"/>
+              </a:rPr>
+              <a:t>	</a:t>
+            </a:r>
+            <a:r>
+              <a:rPr lang="en-US" sz="1500" b="0" u="none" strike="noStrike">
+                <a:solidFill>
+                  <a:srgbClr val="1D1C1D"/>
+                </a:solidFill>
+                <a:effectLst/>
+                <a:uFillTx/>
+                <a:latin typeface="Roboto"/>
+                <a:ea typeface="Roboto"/>
+              </a:rPr>
+              <a:t>int size;</a:t>
+            </a:r>
+            <a:r>
+              <a:rPr lang="en-US" sz="1500" b="0" u="none" strike="noStrike">
+                <a:solidFill>
+                  <a:srgbClr val="1D1C1D"/>
+                </a:solidFill>
+                <a:effectLst/>
+                <a:uFillTx/>
+                <a:latin typeface="Roboto"/>
+                <a:ea typeface="Roboto"/>
+              </a:rPr>
+              <a:t>	</a:t>
+            </a:r>
+            <a:r>
+              <a:rPr lang="en-US" sz="1500" b="0" u="none" strike="noStrike">
+                <a:solidFill>
+                  <a:srgbClr val="1D1C1D"/>
+                </a:solidFill>
+                <a:effectLst/>
+                <a:uFillTx/>
+                <a:latin typeface="Roboto"/>
+                <a:ea typeface="Roboto"/>
+              </a:rPr>
+              <a:t>	</a:t>
+            </a:r>
+            <a:r>
+              <a:rPr lang="en-US" sz="1500" b="0" u="none" strike="noStrike">
+                <a:solidFill>
+                  <a:srgbClr val="1D1C1D"/>
+                </a:solidFill>
+                <a:effectLst/>
+                <a:uFillTx/>
+                <a:latin typeface="Roboto"/>
+                <a:ea typeface="Roboto"/>
+              </a:rPr>
+              <a:t>	</a:t>
+            </a:r>
+            <a:r>
+              <a:rPr lang="en-US" sz="1500" b="0" u="none" strike="noStrike">
+                <a:solidFill>
+                  <a:srgbClr val="1D1C1D"/>
+                </a:solidFill>
+                <a:effectLst/>
+                <a:uFillTx/>
+                <a:latin typeface="Roboto"/>
+                <a:ea typeface="Roboto"/>
+              </a:rPr>
+              <a:t>	</a:t>
+            </a:r>
+            <a:r>
+              <a:rPr lang="en-US" sz="1500" b="0" u="none" strike="noStrike">
+                <a:solidFill>
+                  <a:srgbClr val="1D1C1D"/>
+                </a:solidFill>
+                <a:effectLst/>
+                <a:uFillTx/>
+                <a:latin typeface="Roboto"/>
+                <a:ea typeface="Roboto"/>
+              </a:rPr>
+              <a:t>	</a:t>
+            </a:r>
+            <a:r>
+              <a:rPr lang="en-US" sz="1500" b="0" u="none" strike="noStrike">
+                <a:solidFill>
+                  <a:srgbClr val="1D1C1D"/>
+                </a:solidFill>
+                <a:effectLst/>
+                <a:uFillTx/>
+                <a:latin typeface="Roboto"/>
+                <a:ea typeface="Roboto"/>
+              </a:rPr>
+              <a:t>	</a:t>
+            </a:r>
+            <a:r>
+              <a:rPr lang="en-US" sz="1500" b="0" u="none" strike="noStrike">
+                <a:solidFill>
+                  <a:srgbClr val="1D1C1D"/>
+                </a:solidFill>
+                <a:effectLst/>
+                <a:uFillTx/>
+                <a:latin typeface="Roboto"/>
+                <a:ea typeface="Roboto"/>
+              </a:rPr>
+              <a:t>	</a:t>
+            </a:r>
+            <a:r>
+              <a:rPr lang="en-US" sz="1500" b="0" u="none" strike="noStrike">
+                <a:solidFill>
+                  <a:srgbClr val="1D1C1D"/>
+                </a:solidFill>
+                <a:effectLst/>
+                <a:uFillTx/>
+                <a:latin typeface="Roboto"/>
+                <a:ea typeface="Roboto"/>
+              </a:rPr>
+              <a:t>	</a:t>
+            </a:r>
+            <a:r>
+              <a:rPr lang="en-US" sz="1500" b="0" u="none" strike="noStrike">
+                <a:solidFill>
+                  <a:srgbClr val="1D1C1D"/>
+                </a:solidFill>
+                <a:effectLst/>
+                <a:uFillTx/>
+                <a:latin typeface="Roboto"/>
+                <a:ea typeface="Roboto"/>
+              </a:rPr>
+              <a:t>	</a:t>
+            </a:r>
+            <a:r>
+              <a:rPr lang="en-US" sz="1500" b="0" u="none" strike="noStrike">
+                <a:solidFill>
+                  <a:srgbClr val="1D1C1D"/>
+                </a:solidFill>
+                <a:effectLst/>
+                <a:uFillTx/>
+                <a:latin typeface="Roboto"/>
+                <a:ea typeface="Roboto"/>
+              </a:rPr>
+              <a:t>};</a:t>
+            </a:r>
+            <a:endParaRPr lang="en-US" sz="1500" b="0" u="none" strike="noStrike">
+              <a:solidFill>
+                <a:srgbClr val="000000"/>
+              </a:solidFill>
+              <a:effectLst/>
+              <a:uFillTx/>
+              <a:latin typeface="Arial"/>
+            </a:endParaRPr>
+          </a:p>
+          <a:p>
+            <a:pPr>
+              <a:lnSpc>
+                <a:spcPct val="100000"/>
+              </a:lnSpc>
+              <a:spcBef>
+                <a:spcPts val="340"/>
+              </a:spcBef>
+              <a:spcAft>
+                <a:spcPts val="142"/>
+              </a:spcAft>
+              <a:tabLst>
+                <a:tab pos="0" algn="l"/>
+              </a:tabLst>
+            </a:pPr>
+            <a:r>
+              <a:rPr lang="en-US" sz="1500" b="0" u="none" strike="noStrike">
+                <a:solidFill>
+                  <a:srgbClr val="1D1C1D"/>
+                </a:solidFill>
+                <a:effectLst/>
+                <a:uFillTx/>
+                <a:latin typeface="Roboto"/>
+                <a:ea typeface="Roboto"/>
+              </a:rPr>
+              <a:t>	</a:t>
+            </a:r>
+            <a:r>
+              <a:rPr lang="en-US" sz="1500" b="0" u="none" strike="noStrike">
+                <a:solidFill>
+                  <a:srgbClr val="1D1C1D"/>
+                </a:solidFill>
+                <a:effectLst/>
+                <a:uFillTx/>
+                <a:latin typeface="Roboto"/>
+                <a:ea typeface="Roboto"/>
+              </a:rPr>
+              <a:t>} ThreadSafeQueue;</a:t>
+            </a:r>
+            <a:endParaRPr lang="en-US" sz="1500" b="0" u="none" strike="noStrike">
+              <a:solidFill>
+                <a:srgbClr val="000000"/>
+              </a:solidFill>
+              <a:effectLst/>
+              <a:uFillTx/>
+              <a:latin typeface="Arial"/>
+            </a:endParaRPr>
+          </a:p>
+          <a:p>
+            <a:pPr>
+              <a:lnSpc>
+                <a:spcPct val="100000"/>
+              </a:lnSpc>
+              <a:spcBef>
+                <a:spcPts val="340"/>
+              </a:spcBef>
+              <a:spcAft>
+                <a:spcPts val="142"/>
+              </a:spcAft>
+              <a:tabLst>
+                <a:tab pos="0" algn="l"/>
+              </a:tabLst>
+            </a:pPr>
+            <a:r>
+              <a:rPr lang="en-US" sz="1500" b="0" u="none" strike="noStrike">
+                <a:solidFill>
+                  <a:srgbClr val="1D1C1D"/>
+                </a:solidFill>
+                <a:effectLst/>
+                <a:uFillTx/>
+                <a:latin typeface="Roboto"/>
+                <a:ea typeface="Roboto"/>
+              </a:rPr>
+              <a:t>8. Данные для потока:</a:t>
+            </a:r>
+            <a:endParaRPr lang="en-US" sz="1500" b="0" u="none" strike="noStrike">
+              <a:solidFill>
+                <a:srgbClr val="000000"/>
+              </a:solidFill>
+              <a:effectLst/>
+              <a:uFillTx/>
+              <a:latin typeface="Arial"/>
+            </a:endParaRPr>
+          </a:p>
+          <a:p>
+            <a:pPr>
+              <a:lnSpc>
+                <a:spcPct val="100000"/>
+              </a:lnSpc>
+              <a:spcBef>
+                <a:spcPts val="340"/>
+              </a:spcBef>
+              <a:spcAft>
+                <a:spcPts val="142"/>
+              </a:spcAft>
+              <a:tabLst>
+                <a:tab pos="0" algn="l"/>
+              </a:tabLst>
+            </a:pPr>
+            <a:r>
+              <a:rPr lang="en-US" sz="1500" b="0" u="none" strike="noStrike">
+                <a:solidFill>
+                  <a:srgbClr val="1D1C1D"/>
+                </a:solidFill>
+                <a:effectLst/>
+                <a:uFillTx/>
+                <a:latin typeface="Roboto"/>
+                <a:ea typeface="Roboto"/>
+              </a:rPr>
+              <a:t>	</a:t>
+            </a:r>
+            <a:r>
+              <a:rPr lang="en-US" sz="1500" b="0" u="none" strike="noStrike">
+                <a:solidFill>
+                  <a:srgbClr val="1D1C1D"/>
+                </a:solidFill>
+                <a:effectLst/>
+                <a:uFillTx/>
+                <a:latin typeface="Roboto"/>
+                <a:ea typeface="Roboto"/>
+              </a:rPr>
+              <a:t>struct ThreadData { </a:t>
+            </a:r>
+            <a:endParaRPr lang="en-US" sz="1500" b="0" u="none" strike="noStrike">
+              <a:solidFill>
+                <a:srgbClr val="000000"/>
+              </a:solidFill>
+              <a:effectLst/>
+              <a:uFillTx/>
+              <a:latin typeface="Arial"/>
+            </a:endParaRPr>
+          </a:p>
+          <a:p>
+            <a:pPr>
+              <a:lnSpc>
+                <a:spcPct val="100000"/>
+              </a:lnSpc>
+              <a:spcBef>
+                <a:spcPts val="340"/>
+              </a:spcBef>
+              <a:spcAft>
+                <a:spcPts val="142"/>
+              </a:spcAft>
+              <a:tabLst>
+                <a:tab pos="0" algn="l"/>
+              </a:tabLst>
+            </a:pPr>
+            <a:r>
+              <a:rPr lang="en-US" sz="1500" b="0" u="none" strike="noStrike">
+                <a:solidFill>
+                  <a:srgbClr val="1D1C1D"/>
+                </a:solidFill>
+                <a:effectLst/>
+                <a:uFillTx/>
+                <a:latin typeface="Roboto"/>
+                <a:ea typeface="Roboto"/>
+              </a:rPr>
+              <a:t>	</a:t>
+            </a:r>
+            <a:r>
+              <a:rPr lang="en-US" sz="1500" b="0" u="none" strike="noStrike">
+                <a:solidFill>
+                  <a:srgbClr val="1D1C1D"/>
+                </a:solidFill>
+                <a:effectLst/>
+                <a:uFillTx/>
+                <a:latin typeface="Roboto"/>
+                <a:ea typeface="Roboto"/>
+              </a:rPr>
+              <a:t>	</a:t>
+            </a:r>
+            <a:r>
+              <a:rPr lang="en-US" sz="1500" b="0" u="none" strike="noStrike">
+                <a:solidFill>
+                  <a:srgbClr val="1D1C1D"/>
+                </a:solidFill>
+                <a:effectLst/>
+                <a:uFillTx/>
+                <a:latin typeface="Roboto"/>
+                <a:ea typeface="Roboto"/>
+              </a:rPr>
+              <a:t>int start; </a:t>
+            </a:r>
+            <a:endParaRPr lang="en-US" sz="1500" b="0" u="none" strike="noStrike">
+              <a:solidFill>
+                <a:srgbClr val="000000"/>
+              </a:solidFill>
+              <a:effectLst/>
+              <a:uFillTx/>
+              <a:latin typeface="Arial"/>
+            </a:endParaRPr>
+          </a:p>
+          <a:p>
+            <a:pPr>
+              <a:lnSpc>
+                <a:spcPct val="100000"/>
+              </a:lnSpc>
+              <a:spcBef>
+                <a:spcPts val="340"/>
+              </a:spcBef>
+              <a:spcAft>
+                <a:spcPts val="142"/>
+              </a:spcAft>
+              <a:tabLst>
+                <a:tab pos="0" algn="l"/>
+              </a:tabLst>
+            </a:pPr>
+            <a:r>
+              <a:rPr lang="en-US" sz="1500" b="0" u="none" strike="noStrike">
+                <a:solidFill>
+                  <a:srgbClr val="1D1C1D"/>
+                </a:solidFill>
+                <a:effectLst/>
+                <a:uFillTx/>
+                <a:latin typeface="Roboto"/>
+                <a:ea typeface="Roboto"/>
+              </a:rPr>
+              <a:t>	</a:t>
+            </a:r>
+            <a:r>
+              <a:rPr lang="en-US" sz="1500" b="0" u="none" strike="noStrike">
+                <a:solidFill>
+                  <a:srgbClr val="1D1C1D"/>
+                </a:solidFill>
+                <a:effectLst/>
+                <a:uFillTx/>
+                <a:latin typeface="Roboto"/>
+                <a:ea typeface="Roboto"/>
+              </a:rPr>
+              <a:t>	</a:t>
+            </a:r>
+            <a:r>
+              <a:rPr lang="en-US" sz="1500" b="0" u="none" strike="noStrike">
+                <a:solidFill>
+                  <a:srgbClr val="1D1C1D"/>
+                </a:solidFill>
+                <a:effectLst/>
+                <a:uFillTx/>
+                <a:latin typeface="Roboto"/>
+                <a:ea typeface="Roboto"/>
+              </a:rPr>
+              <a:t>int last; </a:t>
+            </a:r>
+            <a:endParaRPr lang="en-US" sz="1500" b="0" u="none" strike="noStrike">
+              <a:solidFill>
+                <a:srgbClr val="000000"/>
+              </a:solidFill>
+              <a:effectLst/>
+              <a:uFillTx/>
+              <a:latin typeface="Arial"/>
+            </a:endParaRPr>
+          </a:p>
+          <a:p>
+            <a:pPr>
+              <a:lnSpc>
+                <a:spcPct val="100000"/>
+              </a:lnSpc>
+              <a:spcBef>
+                <a:spcPts val="340"/>
+              </a:spcBef>
+              <a:spcAft>
+                <a:spcPts val="142"/>
+              </a:spcAft>
+              <a:tabLst>
+                <a:tab pos="0" algn="l"/>
+              </a:tabLst>
+            </a:pPr>
+            <a:r>
+              <a:rPr lang="en-US" sz="1500" b="0" u="none" strike="noStrike">
+                <a:solidFill>
+                  <a:srgbClr val="1D1C1D"/>
+                </a:solidFill>
+                <a:effectLst/>
+                <a:uFillTx/>
+                <a:latin typeface="Roboto"/>
+                <a:ea typeface="Roboto"/>
+              </a:rPr>
+              <a:t>	</a:t>
+            </a:r>
+            <a:r>
+              <a:rPr lang="en-US" sz="1500" b="0" u="none" strike="noStrike">
+                <a:solidFill>
+                  <a:srgbClr val="1D1C1D"/>
+                </a:solidFill>
+                <a:effectLst/>
+                <a:uFillTx/>
+                <a:latin typeface="Roboto"/>
+                <a:ea typeface="Roboto"/>
+              </a:rPr>
+              <a:t>ThreadSafeQueue *tsq;</a:t>
+            </a:r>
+            <a:endParaRPr lang="en-US" sz="1500" b="0" u="none" strike="noStrike">
+              <a:solidFill>
+                <a:srgbClr val="000000"/>
+              </a:solidFill>
+              <a:effectLst/>
+              <a:uFillTx/>
+              <a:latin typeface="Arial"/>
+            </a:endParaRPr>
+          </a:p>
+          <a:p>
+            <a:pPr>
+              <a:lnSpc>
+                <a:spcPct val="100000"/>
+              </a:lnSpc>
+              <a:spcBef>
+                <a:spcPts val="340"/>
+              </a:spcBef>
+              <a:spcAft>
+                <a:spcPts val="142"/>
+              </a:spcAft>
+              <a:tabLst>
+                <a:tab pos="0" algn="l"/>
+              </a:tabLst>
+            </a:pPr>
+            <a:r>
+              <a:rPr lang="en-US" sz="1500" b="0" u="none" strike="noStrike">
+                <a:solidFill>
+                  <a:srgbClr val="1D1C1D"/>
+                </a:solidFill>
+                <a:effectLst/>
+                <a:uFillTx/>
+                <a:latin typeface="Roboto"/>
+                <a:ea typeface="Roboto"/>
+              </a:rPr>
+              <a:t>	</a:t>
+            </a:r>
+            <a:r>
+              <a:rPr lang="en-US" sz="1500" b="0" u="none" strike="noStrike">
+                <a:solidFill>
+                  <a:srgbClr val="1D1C1D"/>
+                </a:solidFill>
+                <a:effectLst/>
+                <a:uFillTx/>
+                <a:latin typeface="Roboto"/>
+                <a:ea typeface="Roboto"/>
+              </a:rPr>
+              <a:t>};</a:t>
+            </a:r>
+            <a:endParaRPr lang="en-US" sz="1500" b="0" u="none" strike="noStrike">
               <a:solidFill>
                 <a:srgbClr val="000000"/>
               </a:solidFill>
@@ -11399,6 +13162,112 @@
 </file>
 
 <file path=ppt/theme/theme1.xml><?xml version="1.0" encoding="utf-8"?>
+<a:theme xmlns:a="http://schemas.openxmlformats.org/drawingml/2006/main" xmlns:r="http://schemas.openxmlformats.org/officeDocument/2006/relationships" name="Office">
+  <a:themeElements>
+    <a:clrScheme name="LibreOffice">
+      <a:dk1>
+        <a:srgbClr val="000000"/>
+      </a:dk1>
+      <a:lt1>
+        <a:srgbClr val="FFFFFF"/>
+      </a:lt1>
+      <a:dk2>
+        <a:srgbClr val="000000"/>
+      </a:dk2>
+      <a:lt2>
+        <a:srgbClr val="FFFFFF"/>
+      </a:lt2>
+      <a:accent1>
+        <a:srgbClr val="18A303"/>
+      </a:accent1>
+      <a:accent2>
+        <a:srgbClr val="0369A3"/>
+      </a:accent2>
+      <a:accent3>
+        <a:srgbClr val="A33E03"/>
+      </a:accent3>
+      <a:accent4>
+        <a:srgbClr val="8E03A3"/>
+      </a:accent4>
+      <a:accent5>
+        <a:srgbClr val="C99C00"/>
+      </a:accent5>
+      <a:accent6>
+        <a:srgbClr val="C9211E"/>
+      </a:accent6>
+      <a:hlink>
+        <a:srgbClr val="0000EE"/>
+      </a:hlink>
+      <a:folHlink>
+        <a:srgbClr val="551A8B"/>
+      </a:folHlink>
+    </a:clrScheme>
+    <a:fontScheme name="Office">
+      <a:majorFont>
+        <a:latin typeface="Arial" pitchFamily="0" charset="1"/>
+        <a:ea typeface="DejaVu Sans" pitchFamily="0" charset="1"/>
+        <a:cs typeface="DejaVu Sans" pitchFamily="0" charset="1"/>
+      </a:majorFont>
+      <a:minorFont>
+        <a:latin typeface="Arial" pitchFamily="0" charset="1"/>
+        <a:ea typeface="DejaVu Sans" pitchFamily="0" charset="1"/>
+        <a:cs typeface="DejaVu Sans" pitchFamily="0" charset="1"/>
+      </a:minorFont>
+    </a:fontScheme>
+    <a:fmtScheme>
+      <a:fillStyleLst>
+        <a:solidFill>
+          <a:schemeClr val="phClr"/>
+        </a:solidFill>
+        <a:solidFill>
+          <a:schemeClr val="phClr"/>
+        </a:solidFill>
+        <a:solidFill>
+          <a:schemeClr val="phClr"/>
+        </a:solidFill>
+      </a:fillStyleLst>
+      <a:lnStyleLst>
+        <a:ln w="6350" cap="flat" cmpd="sng" algn="ctr">
+          <a:prstDash val="solid"/>
+          <a:miter/>
+        </a:ln>
+        <a:ln w="6350" cap="flat" cmpd="sng" algn="ctr">
+          <a:prstDash val="solid"/>
+          <a:miter/>
+        </a:ln>
+        <a:ln w="6350" cap="flat" cmpd="sng" algn="ctr">
+          <a:prstDash val="solid"/>
+          <a:miter/>
+        </a:ln>
+      </a:lnStyleLst>
+      <a:effectStyleLst>
+        <a:effectStyle>
+          <a:effectLst/>
+        </a:effectStyle>
+        <a:effectStyle>
+          <a:effectLst/>
+        </a:effectStyle>
+        <a:effectStyle>
+          <a:effectLst/>
+        </a:effectStyle>
+      </a:effectStyleLst>
+      <a:bgFillStyleLst>
+        <a:solidFill>
+          <a:schemeClr val="phClr"/>
+        </a:solidFill>
+        <a:solidFill>
+          <a:schemeClr val="phClr"/>
+        </a:solidFill>
+        <a:solidFill>
+          <a:schemeClr val="phClr"/>
+        </a:solidFill>
+      </a:bgFillStyleLst>
+    </a:fmtScheme>
+  </a:themeElements>
+</a:theme>
+</file>
+
+<file path=ppt/theme/theme2.xml><?xml version="1.0" encoding="utf-8"?>
 <a:theme xmlns:a="http://schemas.openxmlformats.org/drawingml/2006/main" xmlns:r="http://schemas.openxmlformats.org/officeDocument/2006/relationships" name="Office">
   <a:themeElements>
     <a:clrScheme name="LibreOffice">
